--- a/lecons/F2T/25_S19_L5_P6_Quaternary_Sector.pptx
+++ b/lecons/F2T/25_S19_L5_P6_Quaternary_Sector.pptx
@@ -641,7 +641,7 @@
           <a:p>
             <a:r>
               <a:rPr lang="en-US" dirty="0"/>
-              <a:t>Question 1: What was the problem in the situation? Think for a moment, then raise your hand to answer.</a:t>
+              <a:t>Question 1: What is the problem in the situation? Think for a moment, then raise your hand to answer.</a:t>
             </a:r>
             <a:endParaRPr lang="en-US" dirty="0"/>
           </a:p>
@@ -729,7 +729,7 @@
           <a:p>
             <a:r>
               <a:rPr lang="en-US" dirty="0"/>
-              <a:t>Good. Drought destroyed the maize.</a:t>
+              <a:t>Good. The farmer does not know the sector of research and its importance.</a:t>
             </a:r>
             <a:endParaRPr lang="en-US" dirty="0"/>
           </a:p>
@@ -817,7 +817,7 @@
           <a:p>
             <a:r>
               <a:rPr lang="en-US" dirty="0"/>
-              <a:t>Question 2: Who solved the problem? Think for a moment, then raise your hand to answer.</a:t>
+              <a:t>Question 2: What destroyed the maize? Think for a moment, then raise your hand to answer.</a:t>
             </a:r>
             <a:endParaRPr lang="en-US" dirty="0"/>
           </a:p>
@@ -905,7 +905,7 @@
           <a:p>
             <a:r>
               <a:rPr lang="en-US" dirty="0"/>
-              <a:t>Good. Researchers, with a new maize.</a:t>
+              <a:t>Good. Drought.</a:t>
             </a:r>
             <a:endParaRPr lang="en-US" dirty="0"/>
           </a:p>
@@ -993,7 +993,7 @@
           <a:p>
             <a:r>
               <a:rPr lang="en-US" dirty="0"/>
-              <a:t>Question 3: Which sector do researchers belong to? Think for a moment, then raise your hand to answer.</a:t>
+              <a:t>Question 3: What did the researchers create? Think for a moment, then raise your hand to answer.</a:t>
             </a:r>
             <a:endParaRPr lang="en-US" dirty="0"/>
           </a:p>
@@ -1081,7 +1081,7 @@
           <a:p>
             <a:r>
               <a:rPr lang="en-US" dirty="0"/>
-              <a:t>Good. The quaternary sector.</a:t>
+              <a:t>Good. A new maize that needs less water.</a:t>
             </a:r>
             <a:endParaRPr lang="en-US" dirty="0"/>
           </a:p>
@@ -1345,7 +1345,7 @@
           <a:p>
             <a:r>
               <a:rPr lang="en-US" dirty="0"/>
-              <a:t>Activity 1. Look carefully at this picture: researchers at work. Observe every detail before I ask the question.</a:t>
+              <a:t>Activity 1. Look carefully at this picture: a researcher. Observe every detail before I ask the question.</a:t>
             </a:r>
             <a:endParaRPr lang="en-US" dirty="0"/>
           </a:p>
@@ -1697,7 +1697,7 @@
           <a:p>
             <a:r>
               <a:rPr lang="en-US" dirty="0"/>
-              <a:t>Activity 2. Look carefully at this picture: researchers test new plants in a field. Observe every detail before I ask the question.</a:t>
+              <a:t>Activity 2. Look carefully at this picture: a research field. Observe every detail before I ask the question.</a:t>
             </a:r>
             <a:endParaRPr lang="en-US" dirty="0"/>
           </a:p>
@@ -1785,7 +1785,7 @@
           <a:p>
             <a:r>
               <a:rPr lang="en-US" dirty="0"/>
-              <a:t>Here is the question for Activity 2: Give one research centre in Cameroon. Take one minute to think and write your answer in your rough notebook.</a:t>
+              <a:t>Here is the question for Activity 2: Name one research centre in Cameroon. Take one minute to think and write your answer in your rough notebook.</a:t>
             </a:r>
             <a:endParaRPr lang="en-US" dirty="0"/>
           </a:p>
@@ -1873,7 +1873,7 @@
           <a:p>
             <a:r>
               <a:rPr lang="en-US" dirty="0"/>
-              <a:t>Let us check the answer together. IRAD (research for farming). Also the universities.</a:t>
+              <a:t>Let us check the answer together. IRAD (also the universities).</a:t>
             </a:r>
             <a:endParaRPr lang="en-US" dirty="0"/>
           </a:p>
@@ -1961,7 +1961,7 @@
           <a:p>
             <a:r>
               <a:rPr lang="en-US" dirty="0"/>
-              <a:t>Activity 3. Look carefully at this picture: a farmer uses a mobile phone. Observe every detail before I ask the question.</a:t>
+              <a:t>Activity 3. Look carefully at this picture: a farmer with a phone. Observe every detail before I ask the question.</a:t>
             </a:r>
             <a:endParaRPr lang="en-US" dirty="0"/>
           </a:p>
@@ -2049,7 +2049,7 @@
           <a:p>
             <a:r>
               <a:rPr lang="en-US" dirty="0"/>
-              <a:t>Here is the question for Activity 3: How does the phone help farmers and traders? Take one minute to think and write your answer in your rough notebook.</a:t>
+              <a:t>Here is the question for Activity 3: How does the phone help farmers? Take one minute to think and write your answer in your rough notebook.</a:t>
             </a:r>
             <a:endParaRPr lang="en-US" dirty="0"/>
           </a:p>
@@ -2137,7 +2137,7 @@
           <a:p>
             <a:r>
               <a:rPr lang="en-US" dirty="0"/>
-              <a:t>Let us check the answer together. They get prices and weather news, and send money.</a:t>
+              <a:t>Let us check the answer together. They get prices and weather news.</a:t>
             </a:r>
             <a:endParaRPr lang="en-US" dirty="0"/>
           </a:p>
@@ -2225,7 +2225,7 @@
           <a:p>
             <a:r>
               <a:rPr lang="en-US" dirty="0"/>
-              <a:t>Activity 4. Look carefully at this picture: students learn with computers. Observe every detail before I ask the question.</a:t>
+              <a:t>Activity 4. Look carefully at this picture: a computer class. Observe every detail before I ask the question.</a:t>
             </a:r>
             <a:endParaRPr lang="en-US" dirty="0"/>
           </a:p>
@@ -2577,7 +2577,7 @@
           <a:p>
             <a:r>
               <a:rPr lang="en-US" dirty="0"/>
-              <a:t>Activity 5. Look carefully at this diagram: research helps all the other sectors. Observe every detail before I ask the question.</a:t>
+              <a:t>Activity 5. Look carefully at this diagram: research helps the other sectors. Observe every detail before I ask the question.</a:t>
             </a:r>
             <a:endParaRPr lang="en-US" dirty="0"/>
           </a:p>
@@ -2665,7 +2665,7 @@
           <a:p>
             <a:r>
               <a:rPr lang="en-US" dirty="0"/>
-              <a:t>Here is the question for Activity 5: How does research help the other sectors? Take one minute to think and write your answer in your rough notebook.</a:t>
+              <a:t>Here is the question for Activity 5: How does research help farming? Take one minute to think and write your answer in your rough notebook.</a:t>
             </a:r>
             <a:endParaRPr lang="en-US" dirty="0"/>
           </a:p>
@@ -2753,7 +2753,7 @@
           <a:p>
             <a:r>
               <a:rPr lang="en-US" dirty="0"/>
-              <a:t>Let us check the answer together. Better seeds, new machines, new medicines and mobile money.</a:t>
+              <a:t>Let us check the answer together. It gives better seeds and new methods.</a:t>
             </a:r>
             <a:endParaRPr lang="en-US" dirty="0"/>
           </a:p>
@@ -2929,7 +2929,7 @@
           <a:p>
             <a:r>
               <a:rPr lang="en-US" dirty="0"/>
-              <a:t>Let us copy Meaning of the Quaternary Sector. The quaternary sector is defined as follows. On this slide we have Quaternary sector and ICT. Write each point on a new line, with the key term first, and explain it in your own words when we revise.</a:t>
+              <a:t>Let us copy the definitions. The key terms of this lesson are defined as follows. On this slide we have Quaternary sector. Write each point on a new line, with the key term first, and explain it in your own words when we revise.</a:t>
             </a:r>
             <a:endParaRPr lang="en-US" dirty="0"/>
           </a:p>
@@ -3017,7 +3017,7 @@
           <a:p>
             <a:r>
               <a:rPr lang="en-US" dirty="0"/>
-              <a:t>Let us copy Examples of the Quaternary Sector. The quaternary sector includes the following activities. On this slide we have Research and ICT. Write each point on a new line, with the key term first, and explain it in your own words when we revise. When you finish, we go to the next slide.</a:t>
+              <a:t>Let us copy Examples of Quaternary Activities. The quaternary sector includes the following activities. Copy the point on Research on the left, then draw the diagram on the right: a research field. Give it a title and label it clearly.</a:t>
             </a:r>
             <a:endParaRPr lang="en-US" dirty="0"/>
           </a:p>
@@ -3105,7 +3105,7 @@
           <a:p>
             <a:r>
               <a:rPr lang="en-US" dirty="0"/>
-              <a:t>We continue with Examples of the Quaternary Sector. On this slide we have Advice. Write each point on a new line, with the key term first, and explain it in your own words when we revise.</a:t>
+              <a:t>We continue with Examples of Quaternary Activities. On this slide we have Universities. Write each point on a new line, with the key term first, and explain it in your own words when we revise.</a:t>
             </a:r>
             <a:endParaRPr lang="en-US" dirty="0"/>
           </a:p>
@@ -3193,7 +3193,7 @@
           <a:p>
             <a:r>
               <a:rPr lang="en-US" dirty="0"/>
-              <a:t>Let us copy Importance of the Quaternary Sector. The quaternary sector is important for the following reasons. On this slide we have Farming and Industry. Write each point on a new line, with the key term first, and explain it in your own words when we revise. When you finish, we go to the next slide.</a:t>
+              <a:t>Copy the point on Information technology on the left, then draw the diagram on the right: a computer class. Give it a title and label it clearly.</a:t>
             </a:r>
             <a:endParaRPr lang="en-US" dirty="0"/>
           </a:p>
@@ -3281,7 +3281,7 @@
           <a:p>
             <a:r>
               <a:rPr lang="en-US" dirty="0"/>
-              <a:t>We continue with Importance of the Quaternary Sector. On this slide we have Services. Write each point on a new line, with the key term first, and explain it in your own words when we revise.</a:t>
+              <a:t>We continue with Examples of Quaternary Activities. On this slide we have Consulting and planning. Write each point on a new line, with the key term first, and explain it in your own words when we revise.</a:t>
             </a:r>
             <a:endParaRPr lang="en-US" dirty="0"/>
           </a:p>
@@ -3369,7 +3369,7 @@
           <a:p>
             <a:r>
               <a:rPr lang="en-US" dirty="0"/>
-              <a:t>Now draw this illustration in your notebook: importance of the quaternary sector. Give it a title and label it clearly.</a:t>
+              <a:t>Copy the point on Importance on the left, then draw the diagram on the right: research helps the other sectors. Give it a title and label it clearly.</a:t>
             </a:r>
             <a:endParaRPr lang="en-US" dirty="0"/>
           </a:p>
@@ -5041,7 +5041,7 @@
           <a:p>
             <a:r>
               <a:rPr lang="en-US" dirty="0"/>
-              <a:t>Listen carefully to this situation from real life. For many years, drought destroyed the maize of farmers near Garoua. Then researchers created a new maize that grows fast and needs less water. Now the harvests are better. Think about it, because I am going to ask you some questions.</a:t>
+              <a:t>Listen carefully to this situation from real life. For many years, drought destroyed the maize of farmers near Garoua. Then researchers created a new maize that grows fast and needs less water, and now the harvests are better. A farmer asks: "What is the work of these researchers called, and how does it help us?" Think about it, because I am going to ask you some questions.</a:t>
             </a:r>
             <a:endParaRPr lang="en-US" dirty="0"/>
           </a:p>
@@ -6505,7 +6505,7 @@
                 <a:ea typeface="Times New Roman" pitchFamily="34" charset="-122"/>
                 <a:cs typeface="Times New Roman" pitchFamily="34" charset="-120"/>
               </a:rPr>
-              <a:t>What was the problem in the situation?</a:t>
+              <a:t>What is the problem in the situation?</a:t>
             </a:r>
             <a:endParaRPr lang="en-US" sz="4000" dirty="0"/>
           </a:p>
@@ -6724,7 +6724,7 @@
                 <a:ea typeface="Times New Roman" pitchFamily="34" charset="-122"/>
                 <a:cs typeface="Times New Roman" pitchFamily="34" charset="-120"/>
               </a:rPr>
-              <a:t>Drought destroyed the maize.</a:t>
+              <a:t>The farmer does not know the sector of research and its importance.</a:t>
             </a:r>
             <a:endParaRPr lang="en-US" sz="4000" dirty="0"/>
           </a:p>
@@ -6943,7 +6943,7 @@
                 <a:ea typeface="Times New Roman" pitchFamily="34" charset="-122"/>
                 <a:cs typeface="Times New Roman" pitchFamily="34" charset="-120"/>
               </a:rPr>
-              <a:t>Who solved the problem?</a:t>
+              <a:t>What destroyed the maize?</a:t>
             </a:r>
             <a:endParaRPr lang="en-US" sz="4000" dirty="0"/>
           </a:p>
@@ -7162,7 +7162,7 @@
                 <a:ea typeface="Times New Roman" pitchFamily="34" charset="-122"/>
                 <a:cs typeface="Times New Roman" pitchFamily="34" charset="-120"/>
               </a:rPr>
-              <a:t>Researchers, with a new maize.</a:t>
+              <a:t>Drought.</a:t>
             </a:r>
             <a:endParaRPr lang="en-US" sz="4000" dirty="0"/>
           </a:p>
@@ -7381,7 +7381,7 @@
                 <a:ea typeface="Times New Roman" pitchFamily="34" charset="-122"/>
                 <a:cs typeface="Times New Roman" pitchFamily="34" charset="-120"/>
               </a:rPr>
-              <a:t>Which sector do researchers belong to?</a:t>
+              <a:t>What did the researchers create?</a:t>
             </a:r>
             <a:endParaRPr lang="en-US" sz="4000" dirty="0"/>
           </a:p>
@@ -7600,7 +7600,7 @@
                 <a:ea typeface="Times New Roman" pitchFamily="34" charset="-122"/>
                 <a:cs typeface="Times New Roman" pitchFamily="34" charset="-120"/>
               </a:rPr>
-              <a:t>The quaternary sector.</a:t>
+              <a:t>A new maize that needs less water.</a:t>
             </a:r>
             <a:endParaRPr lang="en-US" sz="4000" dirty="0"/>
           </a:p>
@@ -8150,7 +8150,7 @@
                 <a:ea typeface="Calibri" pitchFamily="34" charset="-122"/>
                 <a:cs typeface="Calibri" pitchFamily="34" charset="-120"/>
               </a:rPr>
-              <a:t>1. MEANING</a:t>
+              <a:t>DEFINITION</a:t>
             </a:r>
             <a:endParaRPr lang="en-US" sz="1400" dirty="0"/>
           </a:p>
@@ -8252,7 +8252,7 @@
                 <a:ea typeface="Times New Roman" pitchFamily="34" charset="-122"/>
                 <a:cs typeface="Times New Roman" pitchFamily="34" charset="-120"/>
               </a:rPr>
-              <a:t>Researchers at work.</a:t>
+              <a:t>A researcher.</a:t>
             </a:r>
             <a:endParaRPr lang="en-US" sz="1800" dirty="0"/>
           </a:p>
@@ -8364,7 +8364,7 @@
                 <a:ea typeface="Calibri" pitchFamily="34" charset="-122"/>
                 <a:cs typeface="Calibri" pitchFamily="34" charset="-120"/>
               </a:rPr>
-              <a:t>1. MEANING</a:t>
+              <a:t>DEFINITION</a:t>
             </a:r>
             <a:endParaRPr lang="en-US" sz="1400" dirty="0"/>
           </a:p>
@@ -9178,7 +9178,7 @@
                 <a:ea typeface="Calibri" pitchFamily="34" charset="-122"/>
                 <a:cs typeface="Calibri" pitchFamily="34" charset="-120"/>
               </a:rPr>
-              <a:t>1. MEANING</a:t>
+              <a:t>DEFINITION</a:t>
             </a:r>
             <a:endParaRPr lang="en-US" sz="1400" dirty="0"/>
           </a:p>
@@ -9397,7 +9397,7 @@
                 <a:ea typeface="Calibri" pitchFamily="34" charset="-122"/>
                 <a:cs typeface="Calibri" pitchFamily="34" charset="-120"/>
               </a:rPr>
-              <a:t>2. EXAMPLES</a:t>
+              <a:t>EXAMPLES</a:t>
             </a:r>
             <a:endParaRPr lang="en-US" sz="1400" dirty="0"/>
           </a:p>
@@ -9499,7 +9499,7 @@
                 <a:ea typeface="Times New Roman" pitchFamily="34" charset="-122"/>
                 <a:cs typeface="Times New Roman" pitchFamily="34" charset="-120"/>
               </a:rPr>
-              <a:t>Researchers test new plants in a field.</a:t>
+              <a:t>A research field.</a:t>
             </a:r>
             <a:endParaRPr lang="en-US" sz="1800" dirty="0"/>
           </a:p>
@@ -9611,7 +9611,7 @@
                 <a:ea typeface="Calibri" pitchFamily="34" charset="-122"/>
                 <a:cs typeface="Calibri" pitchFamily="34" charset="-120"/>
               </a:rPr>
-              <a:t>2. EXAMPLES</a:t>
+              <a:t>EXAMPLES</a:t>
             </a:r>
             <a:endParaRPr lang="en-US" sz="1400" dirty="0"/>
           </a:p>
@@ -9718,7 +9718,7 @@
                 <a:ea typeface="Times New Roman" pitchFamily="34" charset="-122"/>
                 <a:cs typeface="Times New Roman" pitchFamily="34" charset="-120"/>
               </a:rPr>
-              <a:t>Give one research centre in Cameroon.</a:t>
+              <a:t>Name one research centre in Cameroon.</a:t>
             </a:r>
             <a:endParaRPr lang="en-US" sz="4000" dirty="0"/>
           </a:p>
@@ -9830,7 +9830,7 @@
                 <a:ea typeface="Calibri" pitchFamily="34" charset="-122"/>
                 <a:cs typeface="Calibri" pitchFamily="34" charset="-120"/>
               </a:rPr>
-              <a:t>2. EXAMPLES</a:t>
+              <a:t>EXAMPLES</a:t>
             </a:r>
             <a:endParaRPr lang="en-US" sz="1400" dirty="0"/>
           </a:p>
@@ -9937,7 +9937,7 @@
                 <a:ea typeface="Times New Roman" pitchFamily="34" charset="-122"/>
                 <a:cs typeface="Times New Roman" pitchFamily="34" charset="-120"/>
               </a:rPr>
-              <a:t>IRAD (research for farming). Also the universities.</a:t>
+              <a:t>IRAD (also the universities).</a:t>
             </a:r>
             <a:endParaRPr lang="en-US" sz="4000" dirty="0"/>
           </a:p>
@@ -10049,7 +10049,7 @@
                 <a:ea typeface="Calibri" pitchFamily="34" charset="-122"/>
                 <a:cs typeface="Calibri" pitchFamily="34" charset="-120"/>
               </a:rPr>
-              <a:t>2. EXAMPLES</a:t>
+              <a:t>EXAMPLES</a:t>
             </a:r>
             <a:endParaRPr lang="en-US" sz="1400" dirty="0"/>
           </a:p>
@@ -10151,7 +10151,7 @@
                 <a:ea typeface="Times New Roman" pitchFamily="34" charset="-122"/>
                 <a:cs typeface="Times New Roman" pitchFamily="34" charset="-120"/>
               </a:rPr>
-              <a:t>A farmer uses a mobile phone.</a:t>
+              <a:t>A farmer with a phone.</a:t>
             </a:r>
             <a:endParaRPr lang="en-US" sz="1800" dirty="0"/>
           </a:p>
@@ -10263,7 +10263,7 @@
                 <a:ea typeface="Calibri" pitchFamily="34" charset="-122"/>
                 <a:cs typeface="Calibri" pitchFamily="34" charset="-120"/>
               </a:rPr>
-              <a:t>2. EXAMPLES</a:t>
+              <a:t>EXAMPLES</a:t>
             </a:r>
             <a:endParaRPr lang="en-US" sz="1400" dirty="0"/>
           </a:p>
@@ -10370,7 +10370,7 @@
                 <a:ea typeface="Times New Roman" pitchFamily="34" charset="-122"/>
                 <a:cs typeface="Times New Roman" pitchFamily="34" charset="-120"/>
               </a:rPr>
-              <a:t>How does the phone help farmers and traders?</a:t>
+              <a:t>How does the phone help farmers?</a:t>
             </a:r>
             <a:endParaRPr lang="en-US" sz="4000" dirty="0"/>
           </a:p>
@@ -10482,7 +10482,7 @@
                 <a:ea typeface="Calibri" pitchFamily="34" charset="-122"/>
                 <a:cs typeface="Calibri" pitchFamily="34" charset="-120"/>
               </a:rPr>
-              <a:t>2. EXAMPLES</a:t>
+              <a:t>EXAMPLES</a:t>
             </a:r>
             <a:endParaRPr lang="en-US" sz="1400" dirty="0"/>
           </a:p>
@@ -10589,7 +10589,7 @@
                 <a:ea typeface="Times New Roman" pitchFamily="34" charset="-122"/>
                 <a:cs typeface="Times New Roman" pitchFamily="34" charset="-120"/>
               </a:rPr>
-              <a:t>They get prices and weather news, and send money.</a:t>
+              <a:t>They get prices and weather news.</a:t>
             </a:r>
             <a:endParaRPr lang="en-US" sz="4000" dirty="0"/>
           </a:p>
@@ -10701,7 +10701,7 @@
                 <a:ea typeface="Calibri" pitchFamily="34" charset="-122"/>
                 <a:cs typeface="Calibri" pitchFamily="34" charset="-120"/>
               </a:rPr>
-              <a:t>2. EXAMPLES</a:t>
+              <a:t>EXAMPLES</a:t>
             </a:r>
             <a:endParaRPr lang="en-US" sz="1400" dirty="0"/>
           </a:p>
@@ -10803,7 +10803,7 @@
                 <a:ea typeface="Times New Roman" pitchFamily="34" charset="-122"/>
                 <a:cs typeface="Times New Roman" pitchFamily="34" charset="-120"/>
               </a:rPr>
-              <a:t>Students learn with computers.</a:t>
+              <a:t>A computer class.</a:t>
             </a:r>
             <a:endParaRPr lang="en-US" sz="1800" dirty="0"/>
           </a:p>
@@ -10915,7 +10915,7 @@
                 <a:ea typeface="Calibri" pitchFamily="34" charset="-122"/>
                 <a:cs typeface="Calibri" pitchFamily="34" charset="-120"/>
               </a:rPr>
-              <a:t>2. EXAMPLES</a:t>
+              <a:t>EXAMPLES</a:t>
             </a:r>
             <a:endParaRPr lang="en-US" sz="1400" dirty="0"/>
           </a:p>
@@ -11134,7 +11134,7 @@
                 <a:ea typeface="Calibri" pitchFamily="34" charset="-122"/>
                 <a:cs typeface="Calibri" pitchFamily="34" charset="-120"/>
               </a:rPr>
-              <a:t>2. EXAMPLES</a:t>
+              <a:t>EXAMPLES</a:t>
             </a:r>
             <a:endParaRPr lang="en-US" sz="1400" dirty="0"/>
           </a:p>
@@ -12362,7 +12362,7 @@
                 <a:ea typeface="Calibri" pitchFamily="34" charset="-122"/>
                 <a:cs typeface="Calibri" pitchFamily="34" charset="-120"/>
               </a:rPr>
-              <a:t>3. IMPORTANCE</a:t>
+              <a:t>EXAMPLES</a:t>
             </a:r>
             <a:endParaRPr lang="en-US" sz="1400" dirty="0"/>
           </a:p>
@@ -12464,7 +12464,7 @@
                 <a:ea typeface="Times New Roman" pitchFamily="34" charset="-122"/>
                 <a:cs typeface="Times New Roman" pitchFamily="34" charset="-120"/>
               </a:rPr>
-              <a:t>Research helps all the other sectors.</a:t>
+              <a:t>Research helps the other sectors.</a:t>
             </a:r>
             <a:endParaRPr lang="en-US" sz="1800" dirty="0"/>
           </a:p>
@@ -12576,7 +12576,7 @@
                 <a:ea typeface="Calibri" pitchFamily="34" charset="-122"/>
                 <a:cs typeface="Calibri" pitchFamily="34" charset="-120"/>
               </a:rPr>
-              <a:t>3. IMPORTANCE</a:t>
+              <a:t>EXAMPLES</a:t>
             </a:r>
             <a:endParaRPr lang="en-US" sz="1400" dirty="0"/>
           </a:p>
@@ -12683,7 +12683,7 @@
                 <a:ea typeface="Times New Roman" pitchFamily="34" charset="-122"/>
                 <a:cs typeface="Times New Roman" pitchFamily="34" charset="-120"/>
               </a:rPr>
-              <a:t>How does research help the other sectors?</a:t>
+              <a:t>How does research help farming?</a:t>
             </a:r>
             <a:endParaRPr lang="en-US" sz="4000" dirty="0"/>
           </a:p>
@@ -12795,7 +12795,7 @@
                 <a:ea typeface="Calibri" pitchFamily="34" charset="-122"/>
                 <a:cs typeface="Calibri" pitchFamily="34" charset="-120"/>
               </a:rPr>
-              <a:t>3. IMPORTANCE</a:t>
+              <a:t>EXAMPLES</a:t>
             </a:r>
             <a:endParaRPr lang="en-US" sz="1400" dirty="0"/>
           </a:p>
@@ -12902,7 +12902,7 @@
                 <a:ea typeface="Times New Roman" pitchFamily="34" charset="-122"/>
                 <a:cs typeface="Times New Roman" pitchFamily="34" charset="-120"/>
               </a:rPr>
-              <a:t>Better seeds, new machines, new medicines and mobile money.</a:t>
+              <a:t>It gives better seeds and new methods.</a:t>
             </a:r>
             <a:endParaRPr lang="en-US" sz="4000" dirty="0"/>
           </a:p>
@@ -13113,7 +13113,7 @@
               <a:buNone/>
             </a:pPr>
             <a:r>
-              <a:rPr lang="en-US" sz="4000" b="1" dirty="0">
+              <a:rPr lang="en-US" sz="3200" b="1" dirty="0">
                 <a:solidFill>
                   <a:srgbClr val="111111"/>
                 </a:solidFill>
@@ -13123,7 +13123,7 @@
               </a:rPr>
               <a:t>Topic: Economic Activities</a:t>
             </a:r>
-            <a:endParaRPr lang="en-US" sz="4000" dirty="0"/>
+            <a:endParaRPr lang="en-US" sz="3200" dirty="0"/>
           </a:p>
           <a:p>
             <a:pPr algn="l" indent="0" marL="0">
@@ -13133,7 +13133,7 @@
               <a:buNone/>
             </a:pPr>
             <a:r>
-              <a:rPr lang="en-US" sz="4000" b="1" dirty="0">
+              <a:rPr lang="en-US" sz="3200" b="1" dirty="0">
                 <a:solidFill>
                   <a:srgbClr val="111111"/>
                 </a:solidFill>
@@ -13143,7 +13143,7 @@
               </a:rPr>
               <a:t>Sub-topic: Sectors of the Economy</a:t>
             </a:r>
-            <a:endParaRPr lang="en-US" sz="4000" dirty="0"/>
+            <a:endParaRPr lang="en-US" sz="3200" dirty="0"/>
           </a:p>
           <a:p>
             <a:pPr algn="l" indent="0" marL="0">
@@ -13153,7 +13153,7 @@
               <a:buNone/>
             </a:pPr>
             <a:r>
-              <a:rPr lang="en-US" sz="4000" b="1" dirty="0">
+              <a:rPr lang="en-US" sz="3200" b="1" dirty="0">
                 <a:solidFill>
                   <a:srgbClr val="990011"/>
                 </a:solidFill>
@@ -13163,7 +13163,7 @@
               </a:rPr>
               <a:t>Lesson 5 (Part 6): The Sectors of the Economy: The Quaternary Sector (Definition and Examples)</a:t>
             </a:r>
-            <a:endParaRPr lang="en-US" sz="4000" dirty="0"/>
+            <a:endParaRPr lang="en-US" sz="3200" dirty="0"/>
           </a:p>
         </p:txBody>
       </p:sp>
@@ -13296,7 +13296,7 @@
         <p:spPr>
           <a:xfrm>
             <a:off x="0" y="658368"/>
-            <a:ext cx="2468880" cy="5833872"/>
+            <a:ext cx="5120640" cy="5833872"/>
           </a:xfrm>
           <a:prstGeom prst="rect">
             <a:avLst/>
@@ -13311,8 +13311,8 @@
         </p:nvSpPr>
         <p:spPr>
           <a:xfrm>
-            <a:off x="2697480" y="1005840"/>
-            <a:ext cx="9174175" cy="731520"/>
+            <a:off x="5349240" y="1005840"/>
+            <a:ext cx="6522415" cy="731520"/>
           </a:xfrm>
           <a:prstGeom prst="rect">
             <a:avLst/>
@@ -13338,7 +13338,7 @@
                 <a:ea typeface="Times New Roman" pitchFamily="34" charset="-122"/>
                 <a:cs typeface="Times New Roman" pitchFamily="34" charset="-120"/>
               </a:rPr>
-              <a:t>1. Meaning of the Quaternary Sector</a:t>
+              <a:t>DEFINITIONS</a:t>
             </a:r>
             <a:endParaRPr lang="en-US" sz="3600" dirty="0"/>
           </a:p>
@@ -13352,8 +13352,8 @@
         </p:nvSpPr>
         <p:spPr>
           <a:xfrm>
-            <a:off x="2697480" y="1783080"/>
-            <a:ext cx="9174175" cy="4663440"/>
+            <a:off x="5349240" y="1783080"/>
+            <a:ext cx="6522415" cy="4663440"/>
           </a:xfrm>
           <a:prstGeom prst="rect">
             <a:avLst/>
@@ -13380,16 +13380,17 @@
                 <a:ea typeface="Times New Roman" pitchFamily="34" charset="-122"/>
                 <a:cs typeface="Times New Roman" pitchFamily="34" charset="-120"/>
               </a:rPr>
-              <a:t>The quaternary sector is defined as follows:</a:t>
+              <a:t>The key terms of this lesson are defined as follows:</a:t>
             </a:r>
             <a:endParaRPr lang="en-US" sz="4000" dirty="0"/>
           </a:p>
           <a:p>
-            <a:pPr algn="l" indent="0" marL="0">
+            <a:pPr algn="l" marL="342900" indent="-342900">
               <a:spcAft>
                 <a:spcPts val="800"/>
               </a:spcAft>
-              <a:buNone/>
+              <a:buSzPct val="100000"/>
+              <a:buChar char="•"/>
             </a:pPr>
             <a:r>
               <a:rPr lang="en-US" sz="4000" b="1" dirty="0">
@@ -13402,11 +13403,12 @@
               </a:rPr>
               <a:t>Quaternary sector: </a:t>
             </a:r>
-            <a:pPr algn="l" indent="0" marL="0">
+            <a:pPr algn="l" marL="342900" indent="-342900">
               <a:spcAft>
                 <a:spcPts val="800"/>
               </a:spcAft>
-              <a:buNone/>
+              <a:buSzPct val="100000"/>
+              <a:buChar char="•"/>
             </a:pPr>
             <a:r>
               <a:rPr lang="en-US" sz="4000" dirty="0">
@@ -13417,44 +13419,7 @@
                 <a:ea typeface="Times New Roman" pitchFamily="34" charset="-122"/>
                 <a:cs typeface="Times New Roman" pitchFamily="34" charset="-120"/>
               </a:rPr>
-              <a:t>It is the sector of knowledge, research and information.</a:t>
-            </a:r>
-            <a:endParaRPr lang="en-US" sz="4000" dirty="0"/>
-          </a:p>
-          <a:p>
-            <a:pPr algn="l" indent="0" marL="0">
-              <a:spcAft>
-                <a:spcPts val="800"/>
-              </a:spcAft>
-              <a:buNone/>
-            </a:pPr>
-            <a:r>
-              <a:rPr lang="en-US" sz="4000" b="1" dirty="0">
-                <a:solidFill>
-                  <a:srgbClr val="111111"/>
-                </a:solidFill>
-                <a:latin typeface="Times New Roman" pitchFamily="34" charset="0"/>
-                <a:ea typeface="Times New Roman" pitchFamily="34" charset="-122"/>
-                <a:cs typeface="Times New Roman" pitchFamily="34" charset="-120"/>
-              </a:rPr>
-              <a:t>ICT: </a:t>
-            </a:r>
-            <a:pPr algn="l" indent="0" marL="0">
-              <a:spcAft>
-                <a:spcPts val="800"/>
-              </a:spcAft>
-              <a:buNone/>
-            </a:pPr>
-            <a:r>
-              <a:rPr lang="en-US" sz="4000" dirty="0">
-                <a:solidFill>
-                  <a:srgbClr val="111111"/>
-                </a:solidFill>
-                <a:latin typeface="Times New Roman" pitchFamily="34" charset="0"/>
-                <a:ea typeface="Times New Roman" pitchFamily="34" charset="-122"/>
-                <a:cs typeface="Times New Roman" pitchFamily="34" charset="-120"/>
-              </a:rPr>
-              <a:t>It is information and communication technology: computers, phones and the internet.</a:t>
+              <a:t>It is made of activities based on knowledge, research and information.</a:t>
             </a:r>
             <a:endParaRPr lang="en-US" sz="4000" dirty="0"/>
           </a:p>
@@ -13572,9 +13537,131 @@
           </a:p>
         </p:txBody>
       </p:sp>
+      <p:sp>
+        <p:nvSpPr>
+          <p:cNvPr id="3" name="Text 1"/>
+          <p:cNvSpPr/>
+          <p:nvPr/>
+        </p:nvSpPr>
+        <p:spPr>
+          <a:xfrm>
+            <a:off x="365760" y="1005840"/>
+            <a:ext cx="11460175" cy="731520"/>
+          </a:xfrm>
+          <a:prstGeom prst="rect">
+            <a:avLst/>
+          </a:prstGeom>
+          <a:noFill/>
+          <a:ln/>
+        </p:spPr>
+        <p:txBody>
+          <a:bodyPr wrap="square" lIns="0" tIns="0" rIns="0" bIns="0" rtlCol="0" anchor="ctr">
+            <a:normAutofit/>
+          </a:bodyPr>
+          <a:lstStyle/>
+          <a:p>
+            <a:pPr algn="ctr" indent="0" marL="0">
+              <a:buNone/>
+            </a:pPr>
+            <a:r>
+              <a:rPr lang="en-US" sz="3600" b="1" dirty="0">
+                <a:solidFill>
+                  <a:srgbClr val="990011"/>
+                </a:solidFill>
+                <a:latin typeface="Times New Roman" pitchFamily="34" charset="0"/>
+                <a:ea typeface="Times New Roman" pitchFamily="34" charset="-122"/>
+                <a:cs typeface="Times New Roman" pitchFamily="34" charset="-120"/>
+              </a:rPr>
+              <a:t>Examples of Quaternary Activities</a:t>
+            </a:r>
+            <a:endParaRPr lang="en-US" sz="3600" dirty="0"/>
+          </a:p>
+        </p:txBody>
+      </p:sp>
+      <p:sp>
+        <p:nvSpPr>
+          <p:cNvPr id="4" name="Text 2"/>
+          <p:cNvSpPr/>
+          <p:nvPr/>
+        </p:nvSpPr>
+        <p:spPr>
+          <a:xfrm>
+            <a:off x="365760" y="1783080"/>
+            <a:ext cx="4846320" cy="4617720"/>
+          </a:xfrm>
+          <a:prstGeom prst="rect">
+            <a:avLst/>
+          </a:prstGeom>
+          <a:noFill/>
+          <a:ln/>
+        </p:spPr>
+        <p:txBody>
+          <a:bodyPr wrap="square" lIns="0" tIns="0" rIns="0" bIns="0" rtlCol="0" anchor="t"/>
+          <a:lstStyle/>
+          <a:p>
+            <a:pPr algn="l" indent="0" marL="0">
+              <a:spcAft>
+                <a:spcPts val="800"/>
+              </a:spcAft>
+              <a:buNone/>
+            </a:pPr>
+            <a:r>
+              <a:rPr lang="en-US" sz="3600" i="1" dirty="0">
+                <a:solidFill>
+                  <a:srgbClr val="111111"/>
+                </a:solidFill>
+                <a:latin typeface="Times New Roman" pitchFamily="34" charset="0"/>
+                <a:ea typeface="Times New Roman" pitchFamily="34" charset="-122"/>
+                <a:cs typeface="Times New Roman" pitchFamily="34" charset="-120"/>
+              </a:rPr>
+              <a:t>The quaternary sector includes the following activities:</a:t>
+            </a:r>
+            <a:endParaRPr lang="en-US" sz="3600" dirty="0"/>
+          </a:p>
+          <a:p>
+            <a:pPr algn="l" marL="342900" indent="-342900">
+              <a:spcAft>
+                <a:spcPts val="800"/>
+              </a:spcAft>
+              <a:buSzPct val="100000"/>
+              <a:buChar char="•"/>
+            </a:pPr>
+            <a:r>
+              <a:rPr lang="en-US" sz="3600" b="1" dirty="0">
+                <a:solidFill>
+                  <a:srgbClr val="111111"/>
+                </a:solidFill>
+                <a:latin typeface="Times New Roman" pitchFamily="34" charset="0"/>
+                <a:ea typeface="Times New Roman" pitchFamily="34" charset="-122"/>
+                <a:cs typeface="Times New Roman" pitchFamily="34" charset="-120"/>
+              </a:rPr>
+              <a:t>Research: </a:t>
+            </a:r>
+            <a:pPr algn="l" marL="342900" indent="-342900">
+              <a:spcAft>
+                <a:spcPts val="800"/>
+              </a:spcAft>
+              <a:buSzPct val="100000"/>
+              <a:buChar char="•"/>
+            </a:pPr>
+            <a:r>
+              <a:rPr lang="en-US" sz="3600" dirty="0">
+                <a:solidFill>
+                  <a:srgbClr val="111111"/>
+                </a:solidFill>
+                <a:latin typeface="Times New Roman" pitchFamily="34" charset="0"/>
+                <a:ea typeface="Times New Roman" pitchFamily="34" charset="-122"/>
+                <a:cs typeface="Times New Roman" pitchFamily="34" charset="-120"/>
+              </a:rPr>
+              <a:t>IRAD creates better seeds and animal breeds.</a:t>
+            </a:r>
+            <a:endParaRPr lang="en-US" sz="3600" dirty="0"/>
+          </a:p>
+        </p:txBody>
+      </p:sp>
       <p:pic>
         <p:nvPicPr>
-          <p:cNvPr id="3" name="Image 0" descr="/home/claude/f4/img/minesec_sheet.png">    </p:cNvPr>
+          <p:cNvPr id="5" name="Image 0" descr="/home/claude/f4/img/v2/f2t_field_trial.jpg">    </p:cNvPr>
           <p:cNvPicPr>
             <a:picLocks noChangeAspect="1"/>
           </p:cNvPicPr>
@@ -13588,8 +13675,8 @@
         </p:blipFill>
         <p:spPr>
           <a:xfrm>
-            <a:off x="0" y="658368"/>
-            <a:ext cx="3840480" cy="5833872"/>
+            <a:off x="5349240" y="2069407"/>
+            <a:ext cx="6659575" cy="3697594"/>
           </a:xfrm>
           <a:prstGeom prst="rect">
             <a:avLst/>
@@ -13598,14 +13685,14 @@
       </p:pic>
       <p:sp>
         <p:nvSpPr>
-          <p:cNvPr id="4" name="Text 1"/>
+          <p:cNvPr id="6" name="Text 3"/>
           <p:cNvSpPr/>
           <p:nvPr/>
         </p:nvSpPr>
         <p:spPr>
           <a:xfrm>
-            <a:off x="4069080" y="1005840"/>
-            <a:ext cx="7802575" cy="731520"/>
+            <a:off x="5349240" y="6089904"/>
+            <a:ext cx="6659575" cy="347472"/>
           </a:xfrm>
           <a:prstGeom prst="rect">
             <a:avLst/>
@@ -13614,142 +13701,24 @@
           <a:ln/>
         </p:spPr>
         <p:txBody>
-          <a:bodyPr wrap="square" lIns="0" tIns="0" rIns="0" bIns="0" rtlCol="0" anchor="ctr">
-            <a:normAutofit/>
-          </a:bodyPr>
+          <a:bodyPr wrap="square" lIns="0" tIns="0" rIns="0" bIns="0" rtlCol="0" anchor="ctr"/>
           <a:lstStyle/>
           <a:p>
             <a:pPr algn="ctr" indent="0" marL="0">
               <a:buNone/>
             </a:pPr>
             <a:r>
-              <a:rPr lang="en-US" sz="3600" b="1" dirty="0">
-                <a:solidFill>
-                  <a:srgbClr val="990011"/>
+              <a:rPr lang="en-US" sz="1600" i="1" dirty="0">
+                <a:solidFill>
+                  <a:srgbClr val="555555"/>
                 </a:solidFill>
                 <a:latin typeface="Times New Roman" pitchFamily="34" charset="0"/>
                 <a:ea typeface="Times New Roman" pitchFamily="34" charset="-122"/>
                 <a:cs typeface="Times New Roman" pitchFamily="34" charset="-120"/>
               </a:rPr>
-              <a:t>2. Examples of the Quaternary Sector</a:t>
-            </a:r>
-            <a:endParaRPr lang="en-US" sz="3600" dirty="0"/>
-          </a:p>
-        </p:txBody>
-      </p:sp>
-      <p:sp>
-        <p:nvSpPr>
-          <p:cNvPr id="5" name="Text 2"/>
-          <p:cNvSpPr/>
-          <p:nvPr/>
-        </p:nvSpPr>
-        <p:spPr>
-          <a:xfrm>
-            <a:off x="4069080" y="1783080"/>
-            <a:ext cx="7802575" cy="4663440"/>
-          </a:xfrm>
-          <a:prstGeom prst="rect">
-            <a:avLst/>
-          </a:prstGeom>
-          <a:noFill/>
-          <a:ln/>
-        </p:spPr>
-        <p:txBody>
-          <a:bodyPr wrap="square" lIns="0" tIns="0" rIns="0" bIns="0" rtlCol="0" anchor="t"/>
-          <a:lstStyle/>
-          <a:p>
-            <a:pPr algn="l" indent="0" marL="0">
-              <a:spcAft>
-                <a:spcPts val="800"/>
-              </a:spcAft>
-              <a:buNone/>
-            </a:pPr>
-            <a:r>
-              <a:rPr lang="en-US" sz="4000" i="1" dirty="0">
-                <a:solidFill>
-                  <a:srgbClr val="111111"/>
-                </a:solidFill>
-                <a:latin typeface="Times New Roman" pitchFamily="34" charset="0"/>
-                <a:ea typeface="Times New Roman" pitchFamily="34" charset="-122"/>
-                <a:cs typeface="Times New Roman" pitchFamily="34" charset="-120"/>
-              </a:rPr>
-              <a:t>The quaternary sector includes the following activities:</a:t>
-            </a:r>
-            <a:endParaRPr lang="en-US" sz="4000" dirty="0"/>
-          </a:p>
-          <a:p>
-            <a:pPr algn="l" indent="0" marL="0">
-              <a:spcAft>
-                <a:spcPts val="800"/>
-              </a:spcAft>
-              <a:buNone/>
-            </a:pPr>
-            <a:r>
-              <a:rPr lang="en-US" sz="4000" b="1" dirty="0">
-                <a:solidFill>
-                  <a:srgbClr val="111111"/>
-                </a:solidFill>
-                <a:latin typeface="Times New Roman" pitchFamily="34" charset="0"/>
-                <a:ea typeface="Times New Roman" pitchFamily="34" charset="-122"/>
-                <a:cs typeface="Times New Roman" pitchFamily="34" charset="-120"/>
-              </a:rPr>
-              <a:t>Research: </a:t>
-            </a:r>
-            <a:pPr algn="l" indent="0" marL="0">
-              <a:spcAft>
-                <a:spcPts val="800"/>
-              </a:spcAft>
-              <a:buNone/>
-            </a:pPr>
-            <a:r>
-              <a:rPr lang="en-US" sz="4000" dirty="0">
-                <a:solidFill>
-                  <a:srgbClr val="111111"/>
-                </a:solidFill>
-                <a:latin typeface="Times New Roman" pitchFamily="34" charset="0"/>
-                <a:ea typeface="Times New Roman" pitchFamily="34" charset="-122"/>
-                <a:cs typeface="Times New Roman" pitchFamily="34" charset="-120"/>
-              </a:rPr>
-              <a:t>IRAD and the universities carry out research.</a:t>
-            </a:r>
-            <a:endParaRPr lang="en-US" sz="4000" dirty="0"/>
-          </a:p>
-          <a:p>
-            <a:pPr algn="l" indent="0" marL="0">
-              <a:spcAft>
-                <a:spcPts val="800"/>
-              </a:spcAft>
-              <a:buNone/>
-            </a:pPr>
-            <a:r>
-              <a:rPr lang="en-US" sz="4000" b="1" dirty="0">
-                <a:solidFill>
-                  <a:srgbClr val="111111"/>
-                </a:solidFill>
-                <a:latin typeface="Times New Roman" pitchFamily="34" charset="0"/>
-                <a:ea typeface="Times New Roman" pitchFamily="34" charset="-122"/>
-                <a:cs typeface="Times New Roman" pitchFamily="34" charset="-120"/>
-              </a:rPr>
-              <a:t>ICT: </a:t>
-            </a:r>
-            <a:pPr algn="l" indent="0" marL="0">
-              <a:spcAft>
-                <a:spcPts val="800"/>
-              </a:spcAft>
-              <a:buNone/>
-            </a:pPr>
-            <a:r>
-              <a:rPr lang="en-US" sz="4000" dirty="0">
-                <a:solidFill>
-                  <a:srgbClr val="111111"/>
-                </a:solidFill>
-                <a:latin typeface="Times New Roman" pitchFamily="34" charset="0"/>
-                <a:ea typeface="Times New Roman" pitchFamily="34" charset="-122"/>
-                <a:cs typeface="Times New Roman" pitchFamily="34" charset="-120"/>
-              </a:rPr>
-              <a:t>Specialists create software, websites and phone applications.</a:t>
-            </a:r>
-            <a:endParaRPr lang="en-US" sz="4000" dirty="0"/>
+              <a:t>Illustration: a research field</a:t>
+            </a:r>
+            <a:endParaRPr lang="en-US" sz="1600" dirty="0"/>
           </a:p>
         </p:txBody>
       </p:sp>
@@ -13924,7 +13893,7 @@
                 <a:ea typeface="Times New Roman" pitchFamily="34" charset="-122"/>
                 <a:cs typeface="Times New Roman" pitchFamily="34" charset="-120"/>
               </a:rPr>
-              <a:t>2. Examples of the Quaternary Sector (continued)</a:t>
+              <a:t>Examples of Quaternary Activities</a:t>
             </a:r>
             <a:endParaRPr lang="en-US" sz="3600" dirty="0"/>
           </a:p>
@@ -13951,11 +13920,12 @@
           <a:bodyPr wrap="square" lIns="0" tIns="0" rIns="0" bIns="0" rtlCol="0" anchor="t"/>
           <a:lstStyle/>
           <a:p>
-            <a:pPr algn="l" indent="0" marL="0">
+            <a:pPr algn="l" marL="342900" indent="-342900">
               <a:spcAft>
                 <a:spcPts val="800"/>
               </a:spcAft>
-              <a:buNone/>
+              <a:buSzPct val="100000"/>
+              <a:buChar char="•"/>
             </a:pPr>
             <a:r>
               <a:rPr lang="en-US" sz="4000" b="1" dirty="0">
@@ -13966,13 +13936,14 @@
                 <a:ea typeface="Times New Roman" pitchFamily="34" charset="-122"/>
                 <a:cs typeface="Times New Roman" pitchFamily="34" charset="-120"/>
               </a:rPr>
-              <a:t>Advice: </a:t>
-            </a:r>
-            <a:pPr algn="l" indent="0" marL="0">
+              <a:t>Universities: </a:t>
+            </a:r>
+            <a:pPr algn="l" marL="342900" indent="-342900">
               <a:spcAft>
                 <a:spcPts val="800"/>
               </a:spcAft>
-              <a:buNone/>
+              <a:buSzPct val="100000"/>
+              <a:buChar char="•"/>
             </a:pPr>
             <a:r>
               <a:rPr lang="en-US" sz="4000" dirty="0">
@@ -13983,7 +13954,7 @@
                 <a:ea typeface="Times New Roman" pitchFamily="34" charset="-122"/>
                 <a:cs typeface="Times New Roman" pitchFamily="34" charset="-120"/>
               </a:rPr>
-              <a:t>Experts give advice to the government and companies.</a:t>
+              <a:t>Teaching and research, as at the University of Garoua.</a:t>
             </a:r>
             <a:endParaRPr lang="en-US" sz="4000" dirty="0"/>
           </a:p>
@@ -14101,9 +14072,111 @@
           </a:p>
         </p:txBody>
       </p:sp>
+      <p:sp>
+        <p:nvSpPr>
+          <p:cNvPr id="3" name="Text 1"/>
+          <p:cNvSpPr/>
+          <p:nvPr/>
+        </p:nvSpPr>
+        <p:spPr>
+          <a:xfrm>
+            <a:off x="365760" y="1005840"/>
+            <a:ext cx="11460175" cy="731520"/>
+          </a:xfrm>
+          <a:prstGeom prst="rect">
+            <a:avLst/>
+          </a:prstGeom>
+          <a:noFill/>
+          <a:ln/>
+        </p:spPr>
+        <p:txBody>
+          <a:bodyPr wrap="square" lIns="0" tIns="0" rIns="0" bIns="0" rtlCol="0" anchor="ctr">
+            <a:normAutofit/>
+          </a:bodyPr>
+          <a:lstStyle/>
+          <a:p>
+            <a:pPr algn="ctr" indent="0" marL="0">
+              <a:buNone/>
+            </a:pPr>
+            <a:r>
+              <a:rPr lang="en-US" sz="3600" b="1" dirty="0">
+                <a:solidFill>
+                  <a:srgbClr val="990011"/>
+                </a:solidFill>
+                <a:latin typeface="Times New Roman" pitchFamily="34" charset="0"/>
+                <a:ea typeface="Times New Roman" pitchFamily="34" charset="-122"/>
+                <a:cs typeface="Times New Roman" pitchFamily="34" charset="-120"/>
+              </a:rPr>
+              <a:t>Examples of Quaternary Activities</a:t>
+            </a:r>
+            <a:endParaRPr lang="en-US" sz="3600" dirty="0"/>
+          </a:p>
+        </p:txBody>
+      </p:sp>
+      <p:sp>
+        <p:nvSpPr>
+          <p:cNvPr id="4" name="Text 2"/>
+          <p:cNvSpPr/>
+          <p:nvPr/>
+        </p:nvSpPr>
+        <p:spPr>
+          <a:xfrm>
+            <a:off x="365760" y="1783080"/>
+            <a:ext cx="4846320" cy="4617720"/>
+          </a:xfrm>
+          <a:prstGeom prst="rect">
+            <a:avLst/>
+          </a:prstGeom>
+          <a:noFill/>
+          <a:ln/>
+        </p:spPr>
+        <p:txBody>
+          <a:bodyPr wrap="square" lIns="0" tIns="0" rIns="0" bIns="0" rtlCol="0" anchor="t"/>
+          <a:lstStyle/>
+          <a:p>
+            <a:pPr algn="l" marL="342900" indent="-342900">
+              <a:spcAft>
+                <a:spcPts val="800"/>
+              </a:spcAft>
+              <a:buSzPct val="100000"/>
+              <a:buChar char="•"/>
+            </a:pPr>
+            <a:r>
+              <a:rPr lang="en-US" sz="3600" b="1" dirty="0">
+                <a:solidFill>
+                  <a:srgbClr val="111111"/>
+                </a:solidFill>
+                <a:latin typeface="Times New Roman" pitchFamily="34" charset="0"/>
+                <a:ea typeface="Times New Roman" pitchFamily="34" charset="-122"/>
+                <a:cs typeface="Times New Roman" pitchFamily="34" charset="-120"/>
+              </a:rPr>
+              <a:t>Information technology: </a:t>
+            </a:r>
+            <a:pPr algn="l" marL="342900" indent="-342900">
+              <a:spcAft>
+                <a:spcPts val="800"/>
+              </a:spcAft>
+              <a:buSzPct val="100000"/>
+              <a:buChar char="•"/>
+            </a:pPr>
+            <a:r>
+              <a:rPr lang="en-US" sz="3600" dirty="0">
+                <a:solidFill>
+                  <a:srgbClr val="111111"/>
+                </a:solidFill>
+                <a:latin typeface="Times New Roman" pitchFamily="34" charset="0"/>
+                <a:ea typeface="Times New Roman" pitchFamily="34" charset="-122"/>
+                <a:cs typeface="Times New Roman" pitchFamily="34" charset="-120"/>
+              </a:rPr>
+              <a:t>Software, websites and phone apps.</a:t>
+            </a:r>
+            <a:endParaRPr lang="en-US" sz="3600" dirty="0"/>
+          </a:p>
+        </p:txBody>
+      </p:sp>
       <p:pic>
         <p:nvPicPr>
-          <p:cNvPr id="3" name="Image 0" descr="/home/claude/f4/img/minesec_sheet.png">    </p:cNvPr>
+          <p:cNvPr id="5" name="Image 0" descr="/home/claude/f4/img/v2/f2t_computer_class.jpg">    </p:cNvPr>
           <p:cNvPicPr>
             <a:picLocks noChangeAspect="1"/>
           </p:cNvPicPr>
@@ -14117,8 +14190,8 @@
         </p:blipFill>
         <p:spPr>
           <a:xfrm>
-            <a:off x="0" y="658368"/>
-            <a:ext cx="3840480" cy="5833872"/>
+            <a:off x="5349240" y="2071212"/>
+            <a:ext cx="6659575" cy="3693983"/>
           </a:xfrm>
           <a:prstGeom prst="rect">
             <a:avLst/>
@@ -14127,14 +14200,14 @@
       </p:pic>
       <p:sp>
         <p:nvSpPr>
-          <p:cNvPr id="4" name="Text 1"/>
+          <p:cNvPr id="6" name="Text 3"/>
           <p:cNvSpPr/>
           <p:nvPr/>
         </p:nvSpPr>
         <p:spPr>
           <a:xfrm>
-            <a:off x="4069080" y="1005840"/>
-            <a:ext cx="7802575" cy="731520"/>
+            <a:off x="5349240" y="6089904"/>
+            <a:ext cx="6659575" cy="347472"/>
           </a:xfrm>
           <a:prstGeom prst="rect">
             <a:avLst/>
@@ -14143,142 +14216,24 @@
           <a:ln/>
         </p:spPr>
         <p:txBody>
-          <a:bodyPr wrap="square" lIns="0" tIns="0" rIns="0" bIns="0" rtlCol="0" anchor="ctr">
-            <a:normAutofit/>
-          </a:bodyPr>
+          <a:bodyPr wrap="square" lIns="0" tIns="0" rIns="0" bIns="0" rtlCol="0" anchor="ctr"/>
           <a:lstStyle/>
           <a:p>
             <a:pPr algn="ctr" indent="0" marL="0">
               <a:buNone/>
             </a:pPr>
             <a:r>
-              <a:rPr lang="en-US" sz="3600" b="1" dirty="0">
-                <a:solidFill>
-                  <a:srgbClr val="990011"/>
+              <a:rPr lang="en-US" sz="1600" i="1" dirty="0">
+                <a:solidFill>
+                  <a:srgbClr val="555555"/>
                 </a:solidFill>
                 <a:latin typeface="Times New Roman" pitchFamily="34" charset="0"/>
                 <a:ea typeface="Times New Roman" pitchFamily="34" charset="-122"/>
                 <a:cs typeface="Times New Roman" pitchFamily="34" charset="-120"/>
               </a:rPr>
-              <a:t>3. Importance of the Quaternary Sector</a:t>
-            </a:r>
-            <a:endParaRPr lang="en-US" sz="3600" dirty="0"/>
-          </a:p>
-        </p:txBody>
-      </p:sp>
-      <p:sp>
-        <p:nvSpPr>
-          <p:cNvPr id="5" name="Text 2"/>
-          <p:cNvSpPr/>
-          <p:nvPr/>
-        </p:nvSpPr>
-        <p:spPr>
-          <a:xfrm>
-            <a:off x="4069080" y="1783080"/>
-            <a:ext cx="7802575" cy="4663440"/>
-          </a:xfrm>
-          <a:prstGeom prst="rect">
-            <a:avLst/>
-          </a:prstGeom>
-          <a:noFill/>
-          <a:ln/>
-        </p:spPr>
-        <p:txBody>
-          <a:bodyPr wrap="square" lIns="0" tIns="0" rIns="0" bIns="0" rtlCol="0" anchor="t"/>
-          <a:lstStyle/>
-          <a:p>
-            <a:pPr algn="l" indent="0" marL="0">
-              <a:spcAft>
-                <a:spcPts val="800"/>
-              </a:spcAft>
-              <a:buNone/>
-            </a:pPr>
-            <a:r>
-              <a:rPr lang="en-US" sz="4000" i="1" dirty="0">
-                <a:solidFill>
-                  <a:srgbClr val="111111"/>
-                </a:solidFill>
-                <a:latin typeface="Times New Roman" pitchFamily="34" charset="0"/>
-                <a:ea typeface="Times New Roman" pitchFamily="34" charset="-122"/>
-                <a:cs typeface="Times New Roman" pitchFamily="34" charset="-120"/>
-              </a:rPr>
-              <a:t>The quaternary sector is important for the following reasons:</a:t>
-            </a:r>
-            <a:endParaRPr lang="en-US" sz="4000" dirty="0"/>
-          </a:p>
-          <a:p>
-            <a:pPr algn="l" indent="0" marL="0">
-              <a:spcAft>
-                <a:spcPts val="800"/>
-              </a:spcAft>
-              <a:buNone/>
-            </a:pPr>
-            <a:r>
-              <a:rPr lang="en-US" sz="4000" b="1" dirty="0">
-                <a:solidFill>
-                  <a:srgbClr val="111111"/>
-                </a:solidFill>
-                <a:latin typeface="Times New Roman" pitchFamily="34" charset="0"/>
-                <a:ea typeface="Times New Roman" pitchFamily="34" charset="-122"/>
-                <a:cs typeface="Times New Roman" pitchFamily="34" charset="-120"/>
-              </a:rPr>
-              <a:t>Farming: </a:t>
-            </a:r>
-            <a:pPr algn="l" indent="0" marL="0">
-              <a:spcAft>
-                <a:spcPts val="800"/>
-              </a:spcAft>
-              <a:buNone/>
-            </a:pPr>
-            <a:r>
-              <a:rPr lang="en-US" sz="4000" dirty="0">
-                <a:solidFill>
-                  <a:srgbClr val="111111"/>
-                </a:solidFill>
-                <a:latin typeface="Times New Roman" pitchFamily="34" charset="0"/>
-                <a:ea typeface="Times New Roman" pitchFamily="34" charset="-122"/>
-                <a:cs typeface="Times New Roman" pitchFamily="34" charset="-120"/>
-              </a:rPr>
-              <a:t>Research produces better seeds and methods.</a:t>
-            </a:r>
-            <a:endParaRPr lang="en-US" sz="4000" dirty="0"/>
-          </a:p>
-          <a:p>
-            <a:pPr algn="l" indent="0" marL="0">
-              <a:spcAft>
-                <a:spcPts val="800"/>
-              </a:spcAft>
-              <a:buNone/>
-            </a:pPr>
-            <a:r>
-              <a:rPr lang="en-US" sz="4000" b="1" dirty="0">
-                <a:solidFill>
-                  <a:srgbClr val="111111"/>
-                </a:solidFill>
-                <a:latin typeface="Times New Roman" pitchFamily="34" charset="0"/>
-                <a:ea typeface="Times New Roman" pitchFamily="34" charset="-122"/>
-                <a:cs typeface="Times New Roman" pitchFamily="34" charset="-120"/>
-              </a:rPr>
-              <a:t>Industry: </a:t>
-            </a:r>
-            <a:pPr algn="l" indent="0" marL="0">
-              <a:spcAft>
-                <a:spcPts val="800"/>
-              </a:spcAft>
-              <a:buNone/>
-            </a:pPr>
-            <a:r>
-              <a:rPr lang="en-US" sz="4000" dirty="0">
-                <a:solidFill>
-                  <a:srgbClr val="111111"/>
-                </a:solidFill>
-                <a:latin typeface="Times New Roman" pitchFamily="34" charset="0"/>
-                <a:ea typeface="Times New Roman" pitchFamily="34" charset="-122"/>
-                <a:cs typeface="Times New Roman" pitchFamily="34" charset="-120"/>
-              </a:rPr>
-              <a:t>New machines and techniques improve production.</a:t>
-            </a:r>
-            <a:endParaRPr lang="en-US" sz="4000" dirty="0"/>
+              <a:t>Illustration: a computer class</a:t>
+            </a:r>
+            <a:endParaRPr lang="en-US" sz="1600" dirty="0"/>
           </a:p>
         </p:txBody>
       </p:sp>
@@ -14453,7 +14408,7 @@
                 <a:ea typeface="Times New Roman" pitchFamily="34" charset="-122"/>
                 <a:cs typeface="Times New Roman" pitchFamily="34" charset="-120"/>
               </a:rPr>
-              <a:t>3. Importance of the Quaternary Sector (continued)</a:t>
+              <a:t>Examples of Quaternary Activities</a:t>
             </a:r>
             <a:endParaRPr lang="en-US" sz="3600" dirty="0"/>
           </a:p>
@@ -14480,11 +14435,12 @@
           <a:bodyPr wrap="square" lIns="0" tIns="0" rIns="0" bIns="0" rtlCol="0" anchor="t"/>
           <a:lstStyle/>
           <a:p>
-            <a:pPr algn="l" indent="0" marL="0">
+            <a:pPr algn="l" marL="342900" indent="-342900">
               <a:spcAft>
                 <a:spcPts val="800"/>
               </a:spcAft>
-              <a:buNone/>
+              <a:buSzPct val="100000"/>
+              <a:buChar char="•"/>
             </a:pPr>
             <a:r>
               <a:rPr lang="en-US" sz="4000" b="1" dirty="0">
@@ -14495,13 +14451,14 @@
                 <a:ea typeface="Times New Roman" pitchFamily="34" charset="-122"/>
                 <a:cs typeface="Times New Roman" pitchFamily="34" charset="-120"/>
               </a:rPr>
-              <a:t>Services: </a:t>
-            </a:r>
-            <a:pPr algn="l" indent="0" marL="0">
+              <a:t>Consulting and planning: </a:t>
+            </a:r>
+            <a:pPr algn="l" marL="342900" indent="-342900">
               <a:spcAft>
                 <a:spcPts val="800"/>
               </a:spcAft>
-              <a:buNone/>
+              <a:buSzPct val="100000"/>
+              <a:buChar char="•"/>
             </a:pPr>
             <a:r>
               <a:rPr lang="en-US" sz="4000" dirty="0">
@@ -14512,7 +14469,7 @@
                 <a:ea typeface="Times New Roman" pitchFamily="34" charset="-122"/>
                 <a:cs typeface="Times New Roman" pitchFamily="34" charset="-120"/>
               </a:rPr>
-              <a:t>It creates new services such as mobile money and new medicines.</a:t>
+              <a:t>Experts give advice to companies and the state.</a:t>
             </a:r>
             <a:endParaRPr lang="en-US" sz="4000" dirty="0"/>
           </a:p>
@@ -14638,8 +14595,8 @@
         </p:nvSpPr>
         <p:spPr>
           <a:xfrm>
-            <a:off x="457200" y="1005840"/>
-            <a:ext cx="11277295" cy="731520"/>
+            <a:off x="365760" y="1005840"/>
+            <a:ext cx="11460175" cy="731520"/>
           </a:xfrm>
           <a:prstGeom prst="rect">
             <a:avLst/>
@@ -14648,7 +14605,9 @@
           <a:ln/>
         </p:spPr>
         <p:txBody>
-          <a:bodyPr wrap="square" lIns="0" tIns="0" rIns="0" bIns="0" rtlCol="0" anchor="ctr"/>
+          <a:bodyPr wrap="square" lIns="0" tIns="0" rIns="0" bIns="0" rtlCol="0" anchor="ctr">
+            <a:normAutofit/>
+          </a:bodyPr>
           <a:lstStyle/>
           <a:p>
             <a:pPr algn="ctr" indent="0" marL="0">
@@ -14663,7 +14622,68 @@
                 <a:ea typeface="Times New Roman" pitchFamily="34" charset="-122"/>
                 <a:cs typeface="Times New Roman" pitchFamily="34" charset="-120"/>
               </a:rPr>
-              <a:t>3. Importance of the Quaternary Sector</a:t>
+              <a:t>Examples of Quaternary Activities</a:t>
+            </a:r>
+            <a:endParaRPr lang="en-US" sz="3600" dirty="0"/>
+          </a:p>
+        </p:txBody>
+      </p:sp>
+      <p:sp>
+        <p:nvSpPr>
+          <p:cNvPr id="4" name="Text 2"/>
+          <p:cNvSpPr/>
+          <p:nvPr/>
+        </p:nvSpPr>
+        <p:spPr>
+          <a:xfrm>
+            <a:off x="365760" y="1783080"/>
+            <a:ext cx="4846320" cy="4617720"/>
+          </a:xfrm>
+          <a:prstGeom prst="rect">
+            <a:avLst/>
+          </a:prstGeom>
+          <a:noFill/>
+          <a:ln/>
+        </p:spPr>
+        <p:txBody>
+          <a:bodyPr wrap="square" lIns="0" tIns="0" rIns="0" bIns="0" rtlCol="0" anchor="t"/>
+          <a:lstStyle/>
+          <a:p>
+            <a:pPr algn="l" marL="342900" indent="-342900">
+              <a:spcAft>
+                <a:spcPts val="800"/>
+              </a:spcAft>
+              <a:buSzPct val="100000"/>
+              <a:buChar char="•"/>
+            </a:pPr>
+            <a:r>
+              <a:rPr lang="en-US" sz="3600" b="1" dirty="0">
+                <a:solidFill>
+                  <a:srgbClr val="111111"/>
+                </a:solidFill>
+                <a:latin typeface="Times New Roman" pitchFamily="34" charset="0"/>
+                <a:ea typeface="Times New Roman" pitchFamily="34" charset="-122"/>
+                <a:cs typeface="Times New Roman" pitchFamily="34" charset="-120"/>
+              </a:rPr>
+              <a:t>Importance: </a:t>
+            </a:r>
+            <a:pPr algn="l" marL="342900" indent="-342900">
+              <a:spcAft>
+                <a:spcPts val="800"/>
+              </a:spcAft>
+              <a:buSzPct val="100000"/>
+              <a:buChar char="•"/>
+            </a:pPr>
+            <a:r>
+              <a:rPr lang="en-US" sz="3600" dirty="0">
+                <a:solidFill>
+                  <a:srgbClr val="111111"/>
+                </a:solidFill>
+                <a:latin typeface="Times New Roman" pitchFamily="34" charset="0"/>
+                <a:ea typeface="Times New Roman" pitchFamily="34" charset="-122"/>
+                <a:cs typeface="Times New Roman" pitchFamily="34" charset="-120"/>
+              </a:rPr>
+              <a:t>Research gives new seeds, machines and medicines to the other sectors.</a:t>
             </a:r>
             <a:endParaRPr lang="en-US" sz="3600" dirty="0"/>
           </a:p>
@@ -14671,7 +14691,7 @@
       </p:sp>
       <p:pic>
         <p:nvPicPr>
-          <p:cNvPr id="4" name="Image 0" descr="/home/claude/f4/img/v2/quaternary_big.png">    </p:cNvPr>
+          <p:cNvPr id="5" name="Image 0" descr="/home/claude/f4/img/v2/quaternary_big.png">    </p:cNvPr>
           <p:cNvPicPr>
             <a:picLocks noChangeAspect="1"/>
           </p:cNvPicPr>
@@ -14685,8 +14705,8 @@
         </p:blipFill>
         <p:spPr>
           <a:xfrm>
-            <a:off x="629930" y="1783080"/>
-            <a:ext cx="10931835" cy="4270248"/>
+            <a:off x="5349240" y="2617506"/>
+            <a:ext cx="6659575" cy="2601397"/>
           </a:xfrm>
           <a:prstGeom prst="rect">
             <a:avLst/>
@@ -14695,14 +14715,14 @@
       </p:pic>
       <p:sp>
         <p:nvSpPr>
-          <p:cNvPr id="5" name="Text 2"/>
+          <p:cNvPr id="6" name="Text 3"/>
           <p:cNvSpPr/>
           <p:nvPr/>
         </p:nvSpPr>
         <p:spPr>
           <a:xfrm>
-            <a:off x="457200" y="6089904"/>
-            <a:ext cx="11277295" cy="347472"/>
+            <a:off x="5349240" y="6089904"/>
+            <a:ext cx="6659575" cy="347472"/>
           </a:xfrm>
           <a:prstGeom prst="rect">
             <a:avLst/>
@@ -14718,7 +14738,7 @@
               <a:buNone/>
             </a:pPr>
             <a:r>
-              <a:rPr lang="en-US" sz="1800" i="1" dirty="0">
+              <a:rPr lang="en-US" sz="1600" i="1" dirty="0">
                 <a:solidFill>
                   <a:srgbClr val="555555"/>
                 </a:solidFill>
@@ -14726,9 +14746,9 @@
                 <a:ea typeface="Times New Roman" pitchFamily="34" charset="-122"/>
                 <a:cs typeface="Times New Roman" pitchFamily="34" charset="-120"/>
               </a:rPr>
-              <a:t>Illustration: importance of the quaternary sector</a:t>
-            </a:r>
-            <a:endParaRPr lang="en-US" sz="1800" dirty="0"/>
+              <a:t>Illustration: research helps the other sectors</a:t>
+            </a:r>
+            <a:endParaRPr lang="en-US" sz="1600" dirty="0"/>
           </a:p>
         </p:txBody>
       </p:sp>
@@ -19427,7 +19447,7 @@
                           <a:ea typeface="Calibri" pitchFamily="34" charset="-122"/>
                           <a:cs typeface="Calibri" pitchFamily="34" charset="-120"/>
                         </a:rPr>
-                        <a:t>Meaning of the Quaternary Sector; Examples of the Quaternary Sector; Importance of the Quaternary Sector.</a:t>
+                        <a:t>DEFINITIONS; Examples of Quaternary Activities.</a:t>
                       </a:r>
                       <a:endParaRPr lang="en-US" sz="1600" dirty="0">
                         <a:latin typeface="Calibri" charset="0"/>
@@ -20164,7 +20184,7 @@
         <p:spPr>
           <a:xfrm>
             <a:off x="0" y="658368"/>
-            <a:ext cx="1463040" cy="5833872"/>
+            <a:ext cx="3840480" cy="5833872"/>
           </a:xfrm>
           <a:prstGeom prst="rect">
             <a:avLst/>
@@ -20179,8 +20199,8 @@
         </p:nvSpPr>
         <p:spPr>
           <a:xfrm>
-            <a:off x="1691640" y="1005840"/>
-            <a:ext cx="10180015" cy="731520"/>
+            <a:off x="4069080" y="1005840"/>
+            <a:ext cx="7802575" cy="731520"/>
           </a:xfrm>
           <a:prstGeom prst="rect">
             <a:avLst/>
@@ -20220,8 +20240,8 @@
         </p:nvSpPr>
         <p:spPr>
           <a:xfrm>
-            <a:off x="1691640" y="1783080"/>
-            <a:ext cx="10180015" cy="4663440"/>
+            <a:off x="4069080" y="1783080"/>
+            <a:ext cx="7802575" cy="4663440"/>
           </a:xfrm>
           <a:prstGeom prst="rect">
             <a:avLst/>
@@ -20291,7 +20311,7 @@
                 <a:ea typeface="Calibri" pitchFamily="34" charset="-122"/>
                 <a:cs typeface="Calibri" pitchFamily="34" charset="-120"/>
               </a:rPr>
-              <a:t>Without the projector (Activity 1): use the situation of the new maize.</a:t>
+              <a:t>Without the projector (Activity 1): describe a laboratory.</a:t>
             </a:r>
             <a:endParaRPr lang="en-US" sz="2000" dirty="0"/>
           </a:p>
@@ -20312,7 +20332,7 @@
                 <a:ea typeface="Calibri" pitchFamily="34" charset="-122"/>
                 <a:cs typeface="Calibri" pitchFamily="34" charset="-120"/>
               </a:rPr>
-              <a:t>Without the projector (Activity 2): mention the IRAD station at Garoua.</a:t>
+              <a:t>Without the projector (Activity 2): name IRAD in Garoua.</a:t>
             </a:r>
             <a:endParaRPr lang="en-US" sz="2000" dirty="0"/>
           </a:p>
@@ -20333,7 +20353,7 @@
                 <a:ea typeface="Calibri" pitchFamily="34" charset="-122"/>
                 <a:cs typeface="Calibri" pitchFamily="34" charset="-120"/>
               </a:rPr>
-              <a:t>Without the projector (Activity 3): ask learners how their parents use phones for work.</a:t>
+              <a:t>Without the projector (Activity 3): ask who uses a phone for work.</a:t>
             </a:r>
             <a:endParaRPr lang="en-US" sz="2000" dirty="0"/>
           </a:p>
@@ -20354,7 +20374,7 @@
                 <a:ea typeface="Calibri" pitchFamily="34" charset="-122"/>
                 <a:cs typeface="Calibri" pitchFamily="34" charset="-120"/>
               </a:rPr>
-              <a:t>Without the projector (Activity 4): ask learners who uses a computer at home or at school.</a:t>
+              <a:t>Without the projector (Activity 4): name apps.</a:t>
             </a:r>
             <a:endParaRPr lang="en-US" sz="2000" dirty="0"/>
           </a:p>
@@ -20375,7 +20395,7 @@
                 <a:ea typeface="Calibri" pitchFamily="34" charset="-122"/>
                 <a:cs typeface="Calibri" pitchFamily="34" charset="-120"/>
               </a:rPr>
-              <a:t>Without the projector (Activity 5): draw a circle with four arrows on the board.</a:t>
+              <a:t>Without the projector (Activity 5): draw arrows.</a:t>
             </a:r>
             <a:endParaRPr lang="en-US" sz="2000" dirty="0"/>
           </a:p>
@@ -21713,7 +21733,7 @@
         <p:spPr>
           <a:xfrm>
             <a:off x="0" y="658368"/>
-            <a:ext cx="5120640" cy="5833872"/>
+            <a:ext cx="2468880" cy="5833872"/>
           </a:xfrm>
           <a:prstGeom prst="rect">
             <a:avLst/>
@@ -21728,8 +21748,8 @@
         </p:nvSpPr>
         <p:spPr>
           <a:xfrm>
-            <a:off x="5349240" y="1005840"/>
-            <a:ext cx="6522415" cy="731520"/>
+            <a:off x="2697480" y="1005840"/>
+            <a:ext cx="9174175" cy="731520"/>
           </a:xfrm>
           <a:prstGeom prst="rect">
             <a:avLst/>
@@ -21769,8 +21789,8 @@
         </p:nvSpPr>
         <p:spPr>
           <a:xfrm>
-            <a:off x="5349240" y="1783080"/>
-            <a:ext cx="6522415" cy="4663440"/>
+            <a:off x="2697480" y="1783080"/>
+            <a:ext cx="9174175" cy="4663440"/>
           </a:xfrm>
           <a:prstGeom prst="rect">
             <a:avLst/>
@@ -21797,7 +21817,7 @@
                 <a:ea typeface="Times New Roman" pitchFamily="34" charset="-122"/>
                 <a:cs typeface="Times New Roman" pitchFamily="34" charset="-120"/>
               </a:rPr>
-              <a:t>For many years, drought destroyed the maize of farmers near Garoua. Then researchers created a new maize that grows fast and needs less water. Now the harvests are better.</a:t>
+              <a:t>For many years, drought destroyed the maize of farmers near Garoua. Then researchers created a new maize that grows fast and needs less water, and now the harvests are better. A farmer asks: "What is the work of these researchers called, and how does it help us?"</a:t>
             </a:r>
             <a:endParaRPr lang="en-US" sz="4000" dirty="0"/>
           </a:p>

--- a/lecons/F2T/25_S19_L5_P6_Quaternary_Sector.pptx
+++ b/lecons/F2T/25_S19_L5_P6_Quaternary_Sector.pptx
@@ -3017,7 +3017,7 @@
           <a:p>
             <a:r>
               <a:rPr lang="en-US" dirty="0"/>
-              <a:t>Let us copy Examples of Quaternary Activities. The quaternary sector includes the following activities. Copy the point on Research on the left, then draw the diagram on the right: a research field. Give it a title and label it clearly.</a:t>
+              <a:t>Let us copy Examples of Quaternary Activities. The activities and importance of the quaternary sector are the following. Copy the point on Research on the left, then draw the diagram on the right: a research field. Give it a title and label it clearly.</a:t>
             </a:r>
             <a:endParaRPr lang="en-US" dirty="0"/>
           </a:p>
@@ -13614,7 +13614,7 @@
                 <a:ea typeface="Times New Roman" pitchFamily="34" charset="-122"/>
                 <a:cs typeface="Times New Roman" pitchFamily="34" charset="-120"/>
               </a:rPr>
-              <a:t>The quaternary sector includes the following activities:</a:t>
+              <a:t>The activities and importance of the quaternary sector are the following:</a:t>
             </a:r>
             <a:endParaRPr lang="en-US" sz="3600" dirty="0"/>
           </a:p>

--- a/lecons/F2T/25_S19_L5_P6_Quaternary_Sector.pptx
+++ b/lecons/F2T/25_S19_L5_P6_Quaternary_Sector.pptx
@@ -3457,7 +3457,7 @@
           <a:p>
             <a:r>
               <a:rPr lang="en-US" dirty="0"/>
-              <a:t>Before we start the new lesson, let us correct the homework I gave you at the end of Lesson 5 (Part 5): The Sectors of the Economy: The Tertiary Sector (Definition and Examples). The question was: Find out what a research centre does. Ask an adult or read about IRAD (Institute of Agricultural Research for Development). Take out your exercise books.</a:t>
+              <a:t>Before we start the new lesson, let us correct the homework I gave you at the end of Lesson 5 (Part 5): The Sectors of the Economy: The Tertiary Sector (Definition and Examples). The question was: Name one research centre in Cameroon. Take out your exercise books.</a:t>
             </a:r>
             <a:endParaRPr lang="en-US" dirty="0"/>
           </a:p>
@@ -4073,7 +4073,7 @@
           <a:p>
             <a:r>
               <a:rPr lang="en-US" dirty="0"/>
-              <a:t>For your homework: On a map of Africa in your atlas, find Cameroon and name the four oceans and seas that surround Africa. We shall correct it at the beginning of our next lesson.</a:t>
+              <a:t>For your homework: Name the four oceans and seas around Africa. We shall correct it at the beginning of our next lesson.</a:t>
             </a:r>
             <a:endParaRPr lang="en-US" dirty="0"/>
           </a:p>
@@ -4425,7 +4425,7 @@
           <a:p>
             <a:r>
               <a:rPr lang="en-US" dirty="0"/>
-              <a:t>Here is a good answer. IRAD carries out research to produce better seeds and animal breeds and gives advice to farmers; for example it has developed improved maize and sorghum varieties. Compare it with your own answer and correct your work in red.</a:t>
+              <a:t>Here is a good answer. IRAD. Compare it with your own answer and correct your work in red.</a:t>
             </a:r>
             <a:endParaRPr lang="en-US" dirty="0"/>
           </a:p>
@@ -14881,7 +14881,7 @@
         <p:spPr>
           <a:xfrm>
             <a:off x="0" y="658368"/>
-            <a:ext cx="2468880" cy="5833872"/>
+            <a:ext cx="5120640" cy="5833872"/>
           </a:xfrm>
           <a:prstGeom prst="rect">
             <a:avLst/>
@@ -14896,8 +14896,8 @@
         </p:nvSpPr>
         <p:spPr>
           <a:xfrm>
-            <a:off x="2697480" y="1005840"/>
-            <a:ext cx="9174175" cy="731520"/>
+            <a:off x="5349240" y="1005840"/>
+            <a:ext cx="6522415" cy="731520"/>
           </a:xfrm>
           <a:prstGeom prst="rect">
             <a:avLst/>
@@ -14937,8 +14937,8 @@
         </p:nvSpPr>
         <p:spPr>
           <a:xfrm>
-            <a:off x="2697480" y="1783080"/>
-            <a:ext cx="9174175" cy="4663440"/>
+            <a:off x="5349240" y="1783080"/>
+            <a:ext cx="6522415" cy="4663440"/>
           </a:xfrm>
           <a:prstGeom prst="rect">
             <a:avLst/>
@@ -14985,7 +14985,7 @@
                 <a:ea typeface="Times New Roman" pitchFamily="34" charset="-122"/>
                 <a:cs typeface="Times New Roman" pitchFamily="34" charset="-120"/>
               </a:rPr>
-              <a:t>Find out what a research centre does. Ask an adult or read about IRAD (Institute of Agricultural Research for Development).</a:t>
+              <a:t>Name one research centre in Cameroon.</a:t>
             </a:r>
             <a:endParaRPr lang="en-US" sz="4000" dirty="0"/>
           </a:p>
@@ -16564,7 +16564,7 @@
                 <a:ea typeface="Times New Roman" pitchFamily="34" charset="-122"/>
                 <a:cs typeface="Times New Roman" pitchFamily="34" charset="-120"/>
               </a:rPr>
-              <a:t>On a map of Africa in your atlas, find Cameroon and name the four oceans and seas that surround Africa.</a:t>
+              <a:t>Name the four oceans and seas around Africa.</a:t>
             </a:r>
             <a:endParaRPr lang="en-US" sz="4000" dirty="0"/>
           </a:p>
@@ -19178,7 +19178,7 @@
                 <a:ea typeface="Times New Roman" pitchFamily="34" charset="-122"/>
                 <a:cs typeface="Times New Roman" pitchFamily="34" charset="-120"/>
               </a:rPr>
-              <a:t>IRAD carries out research to produce better seeds and animal breeds and gives advice to farmers; for example it has developed improved maize and sorghum varieties.</a:t>
+              <a:t>IRAD.</a:t>
             </a:r>
             <a:endParaRPr lang="en-US" sz="4000" dirty="0"/>
           </a:p>
@@ -19723,7 +19723,7 @@
                           <a:ea typeface="Calibri" pitchFamily="34" charset="-122"/>
                           <a:cs typeface="Calibri" pitchFamily="34" charset="-120"/>
                         </a:rPr>
-                        <a:t>On a map of Africa in your atlas, find Cameroon and name the four oceans and seas that surround Africa.</a:t>
+                        <a:t>Name the four oceans and seas around Africa.</a:t>
                       </a:r>
                       <a:endParaRPr lang="en-US" sz="1600" dirty="0">
                         <a:latin typeface="Calibri" charset="0"/>

--- a/lecons/F2T/25_S19_L5_P6_Quaternary_Sector.pptx
+++ b/lecons/F2T/25_S19_L5_P6_Quaternary_Sector.pptx
@@ -57,9 +57,10 @@
     <p:sldId id="305" r:id="rId51"/>
     <p:sldId id="306" r:id="rId52"/>
     <p:sldId id="307" r:id="rId53"/>
+    <p:sldId id="308" r:id="rId54"/>
   </p:sldIdLst>
   <p:notesMasterIdLst>
-    <p:notesMasterId r:id="rId54"/>
+    <p:notesMasterId r:id="rId55"/>
   </p:notesMasterIdLst>
   <p:sldSz cx="12192000" cy="6858000"/>
   <p:notesSz cx="6858000" cy="12192000"/>
@@ -3017,7 +3018,7 @@
           <a:p>
             <a:r>
               <a:rPr lang="en-US" dirty="0"/>
-              <a:t>Let us copy Examples of Quaternary Activities. The activities and importance of the quaternary sector are the following. Copy the point on Research on the left, then draw the diagram on the right: a research field. Give it a title and label it clearly.</a:t>
+              <a:t>Let us copy Activities. The main quaternary activities are the following. Copy the point on Research on the left, then draw the diagram on the right: a research field. Give it a title and label it clearly.</a:t>
             </a:r>
             <a:endParaRPr lang="en-US" dirty="0"/>
           </a:p>
@@ -3105,7 +3106,7 @@
           <a:p>
             <a:r>
               <a:rPr lang="en-US" dirty="0"/>
-              <a:t>We continue with Examples of Quaternary Activities. On this slide we have Universities. Write each point on a new line, with the key term first, and explain it in your own words when we revise.</a:t>
+              <a:t>We continue with Activities. On this slide we have Universities. Write each point on a new line, with the key term first, and explain it in your own words when we revise.</a:t>
             </a:r>
             <a:endParaRPr lang="en-US" dirty="0"/>
           </a:p>
@@ -3281,7 +3282,7 @@
           <a:p>
             <a:r>
               <a:rPr lang="en-US" dirty="0"/>
-              <a:t>We continue with Examples of Quaternary Activities. On this slide we have Consulting and planning. Write each point on a new line, with the key term first, and explain it in your own words when we revise.</a:t>
+              <a:t>We continue with Activities. On this slide we have Consulting and planning. Write each point on a new line, with the key term first, and explain it in your own words when we revise.</a:t>
             </a:r>
             <a:endParaRPr lang="en-US" dirty="0"/>
           </a:p>
@@ -3369,7 +3370,7 @@
           <a:p>
             <a:r>
               <a:rPr lang="en-US" dirty="0"/>
-              <a:t>Copy the point on Importance on the left, then draw the diagram on the right: research helps the other sectors. Give it a title and label it clearly.</a:t>
+              <a:t>Let us copy Importance. The quaternary sector is important for the following reasons. Copy the point on New seeds on the left, then draw the diagram on the right: research helps the other sectors. Give it a title and label it clearly.</a:t>
             </a:r>
             <a:endParaRPr lang="en-US" dirty="0"/>
           </a:p>
@@ -3545,7 +3546,7 @@
           <a:p>
             <a:r>
               <a:rPr lang="en-US" dirty="0"/>
-              <a:t>Now let us check what you have understood. Question 1: What is the quaternary sector? Answer in your exercise book.</a:t>
+              <a:t>We continue with Importance. On this slide we have New machines and New medicines. Write each point on a new line, with the key term first, and explain it in your own words when we revise.</a:t>
             </a:r>
             <a:endParaRPr lang="en-US" dirty="0"/>
           </a:p>
@@ -3633,7 +3634,7 @@
           <a:p>
             <a:r>
               <a:rPr lang="en-US" dirty="0"/>
-              <a:t>The expected answer is: the sector of knowledge and research. If you got it right, well done.</a:t>
+              <a:t>Now let us check what you have understood. Question 1: What is the quaternary sector? Answer in your exercise book.</a:t>
             </a:r>
             <a:endParaRPr lang="en-US" dirty="0"/>
           </a:p>
@@ -3721,7 +3722,7 @@
           <a:p>
             <a:r>
               <a:rPr lang="en-US" dirty="0"/>
-              <a:t>Now let us check what you have understood. Question 2: Give one example of how research helps farmers. Answer in your exercise book.</a:t>
+              <a:t>The expected answer is: the sector of knowledge and research. If you got it right, well done.</a:t>
             </a:r>
             <a:endParaRPr lang="en-US" dirty="0"/>
           </a:p>
@@ -3809,7 +3810,7 @@
           <a:p>
             <a:r>
               <a:rPr lang="en-US" dirty="0"/>
-              <a:t>The expected answer is: it gives better seeds that resist drought. If you got it right, well done.</a:t>
+              <a:t>Now let us check what you have understood. Question 2: Give one example of how research helps farmers. Answer in your exercise book.</a:t>
             </a:r>
             <a:endParaRPr lang="en-US" dirty="0"/>
           </a:p>
@@ -3897,7 +3898,7 @@
           <a:p>
             <a:r>
               <a:rPr lang="en-US" dirty="0"/>
-              <a:t>Take your time to copy this part; we will continue together.</a:t>
+              <a:t>The expected answer is: it gives better seeds that resist drought. If you got it right, well done.</a:t>
             </a:r>
             <a:endParaRPr lang="en-US" dirty="0"/>
           </a:p>
@@ -3985,7 +3986,7 @@
           <a:p>
             <a:r>
               <a:rPr lang="en-US" dirty="0"/>
-              <a:t>For those who need more practice, fill in the blanks in your exercise book. The answers are: number 1, quaternary; number 2, IRAD; number 3, ICT.</a:t>
+              <a:t>Take your time to copy this part; we will continue together.</a:t>
             </a:r>
             <a:endParaRPr lang="en-US" dirty="0"/>
           </a:p>
@@ -4073,7 +4074,7 @@
           <a:p>
             <a:r>
               <a:rPr lang="en-US" dirty="0"/>
-              <a:t>For your homework: Name the four oceans and seas around Africa. We shall correct it at the beginning of our next lesson.</a:t>
+              <a:t>For those who need more practice, fill in the blanks in your exercise book. The answers are: number 1, quaternary; number 2, IRAD; number 3, ICT.</a:t>
             </a:r>
             <a:endParaRPr lang="en-US" dirty="0"/>
           </a:p>
@@ -4161,7 +4162,7 @@
           <a:p>
             <a:r>
               <a:rPr lang="en-US" dirty="0"/>
-              <a:t>Our next lesson will be on Lesson 6 (Part 1): Africa: Introduction (Location and Physical Characteristics). Thank you for your attention, and see you next time.</a:t>
+              <a:t>For your homework: Name the four oceans and seas around Africa. We shall correct it at the beginning of our next lesson.</a:t>
             </a:r>
             <a:endParaRPr lang="en-US" dirty="0"/>
           </a:p>
@@ -4249,7 +4250,7 @@
           <a:p>
             <a:r>
               <a:rPr lang="en-US" dirty="0"/>
-              <a:t>Let us play the bilingual game. I say a word in English, and you give me the French word. Then we do the reverse.</a:t>
+              <a:t>Our next lesson will be on Lesson 6 (Part 1): Africa: Introduction (Location and Physical Characteristics). Thank you for your attention, and see you next time.</a:t>
             </a:r>
             <a:endParaRPr lang="en-US" dirty="0"/>
           </a:p>
@@ -4337,7 +4338,7 @@
           <a:p>
             <a:r>
               <a:rPr lang="en-US" dirty="0"/>
-              <a:t>I record this information in the official logbook of the class after the lesson.</a:t>
+              <a:t>Let us play the bilingual game. I say a word in English, and you give me the French word. Then we do the reverse.</a:t>
             </a:r>
             <a:endParaRPr lang="en-US" dirty="0"/>
           </a:p>
@@ -4513,7 +4514,7 @@
           <a:p>
             <a:r>
               <a:rPr lang="en-US" dirty="0"/>
-              <a:t>I complete the second page of the logbook: the matter taught, the evaluation, the homework and the attendance.</a:t>
+              <a:t>I record this information in the official logbook of the class after the lesson.</a:t>
             </a:r>
             <a:endParaRPr lang="en-US" dirty="0"/>
           </a:p>
@@ -4601,7 +4602,7 @@
           <a:p>
             <a:r>
               <a:rPr lang="en-US" dirty="0"/>
-              <a:t>This slide is for me, the teacher: it gives the timing of the lesson and what to do if the projector is not available.</a:t>
+              <a:t>I complete the second page of the logbook: the matter taught, the evaluation, the homework and the attendance.</a:t>
             </a:r>
             <a:endParaRPr lang="en-US" dirty="0"/>
           </a:p>
@@ -4689,7 +4690,7 @@
           <a:p>
             <a:r>
               <a:rPr lang="en-US" dirty="0"/>
-              <a:t>These are the references and picture credits used to prepare this lesson.</a:t>
+              <a:t>This slide is for me, the teacher: it gives the timing of the lesson and what to do if the projector is not available.</a:t>
             </a:r>
             <a:endParaRPr lang="en-US" dirty="0"/>
           </a:p>
@@ -4713,6 +4714,94 @@
             <a:fld id="{F7021451-1387-4CA6-816F-3879F97B5CBC}" type="slidenum">
               <a:rPr lang="en-US"/>
               <a:t>52</a:t>
+            </a:fld>
+            <a:endParaRPr lang="en-US"/>
+          </a:p>
+        </p:txBody>
+      </p:sp>
+    </p:spTree>
+    <p:extLst>
+      <p:ext uri="{BB962C8B-B14F-4D97-AF65-F5344CB8AC3E}">
+        <p14:creationId xmlns:p14="http://schemas.microsoft.com/office/powerpoint/2010/main" val="1024086991"/>
+      </p:ext>
+    </p:extLst>
+  </p:cSld>
+  <p:clrMapOvr>
+    <a:masterClrMapping/>
+  </p:clrMapOvr>
+</p:notes>
+</file>
+
+<file path=ppt/notesSlides/notesSlide53.xml><?xml version="1.0" encoding="utf-8"?>
+<p:notes xmlns:a="http://schemas.openxmlformats.org/drawingml/2006/main" xmlns:r="http://schemas.openxmlformats.org/officeDocument/2006/relationships" xmlns:p="http://schemas.openxmlformats.org/presentationml/2006/main">
+  <p:cSld>
+    <p:spTree>
+      <p:nvGrpSpPr>
+        <p:cNvPr id="1" name=""/>
+        <p:cNvGrpSpPr/>
+        <p:nvPr/>
+      </p:nvGrpSpPr>
+      <p:grpSpPr>
+        <a:xfrm>
+          <a:off x="0" y="0"/>
+          <a:ext cx="0" cy="0"/>
+          <a:chOff x="0" y="0"/>
+          <a:chExt cx="0" cy="0"/>
+        </a:xfrm>
+      </p:grpSpPr>
+      <p:sp>
+        <p:nvSpPr>
+          <p:cNvPr id="2" name="Slide Image Placeholder 1"/>
+          <p:cNvSpPr>
+            <a:spLocks noGrp="1" noRot="1" noChangeAspect="1"/>
+          </p:cNvSpPr>
+          <p:nvPr>
+            <p:ph type="sldImg"/>
+          </p:nvPr>
+        </p:nvSpPr>
+        <p:spPr/>
+      </p:sp>
+      <p:sp>
+        <p:nvSpPr>
+          <p:cNvPr id="3" name="Notes Placeholder 2"/>
+          <p:cNvSpPr>
+            <a:spLocks noGrp="1"/>
+          </p:cNvSpPr>
+          <p:nvPr>
+            <p:ph type="body" idx="1"/>
+          </p:nvPr>
+        </p:nvSpPr>
+        <p:spPr/>
+        <p:txBody>
+          <a:bodyPr/>
+          <a:lstStyle/>
+          <a:p>
+            <a:r>
+              <a:rPr lang="en-US" dirty="0"/>
+              <a:t>These are the references and picture credits used to prepare this lesson.</a:t>
+            </a:r>
+            <a:endParaRPr lang="en-US" dirty="0"/>
+          </a:p>
+        </p:txBody>
+      </p:sp>
+      <p:sp>
+        <p:nvSpPr>
+          <p:cNvPr id="4" name="Slide Number Placeholder 3"/>
+          <p:cNvSpPr>
+            <a:spLocks noGrp="1"/>
+          </p:cNvSpPr>
+          <p:nvPr>
+            <p:ph type="sldNum" sz="quarter" idx="10"/>
+          </p:nvPr>
+        </p:nvSpPr>
+        <p:spPr/>
+        <p:txBody>
+          <a:bodyPr/>
+          <a:lstStyle/>
+          <a:p>
+            <a:fld id="{F7021451-1387-4CA6-816F-3879F97B5CBC}" type="slidenum">
+              <a:rPr lang="en-US"/>
+              <a:t>53</a:t>
             </a:fld>
             <a:endParaRPr lang="en-US"/>
           </a:p>
@@ -13586,8 +13675,49 @@
         </p:nvSpPr>
         <p:spPr>
           <a:xfrm>
-            <a:off x="365760" y="1783080"/>
-            <a:ext cx="4846320" cy="4617720"/>
+            <a:off x="365760" y="1737360"/>
+            <a:ext cx="5120640" cy="457200"/>
+          </a:xfrm>
+          <a:prstGeom prst="rect">
+            <a:avLst/>
+          </a:prstGeom>
+          <a:noFill/>
+          <a:ln/>
+        </p:spPr>
+        <p:txBody>
+          <a:bodyPr wrap="square" lIns="0" tIns="0" rIns="0" bIns="0" rtlCol="0" anchor="ctr">
+            <a:normAutofit/>
+          </a:bodyPr>
+          <a:lstStyle/>
+          <a:p>
+            <a:pPr algn="l" indent="0" marL="0">
+              <a:buNone/>
+            </a:pPr>
+            <a:r>
+              <a:rPr lang="en-US" sz="3000" b="1" dirty="0">
+                <a:solidFill>
+                  <a:srgbClr val="990011"/>
+                </a:solidFill>
+                <a:latin typeface="Times New Roman" pitchFamily="34" charset="0"/>
+                <a:ea typeface="Times New Roman" pitchFamily="34" charset="-122"/>
+                <a:cs typeface="Times New Roman" pitchFamily="34" charset="-120"/>
+              </a:rPr>
+              <a:t>A) Activities</a:t>
+            </a:r>
+            <a:endParaRPr lang="en-US" sz="3000" dirty="0"/>
+          </a:p>
+        </p:txBody>
+      </p:sp>
+      <p:sp>
+        <p:nvSpPr>
+          <p:cNvPr id="5" name="Text 3"/>
+          <p:cNvSpPr/>
+          <p:nvPr/>
+        </p:nvSpPr>
+        <p:spPr>
+          <a:xfrm>
+            <a:off x="365760" y="2240280"/>
+            <a:ext cx="4846320" cy="4160520"/>
           </a:xfrm>
           <a:prstGeom prst="rect">
             <a:avLst/>
@@ -13614,7 +13744,7 @@
                 <a:ea typeface="Times New Roman" pitchFamily="34" charset="-122"/>
                 <a:cs typeface="Times New Roman" pitchFamily="34" charset="-120"/>
               </a:rPr>
-              <a:t>The activities and importance of the quaternary sector are the following:</a:t>
+              <a:t>The main quaternary activities are the following:</a:t>
             </a:r>
             <a:endParaRPr lang="en-US" sz="3600" dirty="0"/>
           </a:p>
@@ -13661,7 +13791,7 @@
       </p:sp>
       <p:pic>
         <p:nvPicPr>
-          <p:cNvPr id="5" name="Image 0" descr="/home/claude/f4/img/v2/f2t_field_trial.jpg">    </p:cNvPr>
+          <p:cNvPr id="6" name="Image 0" descr="/home/claude/f4/img/v2/f2t_field_trial.jpg">    </p:cNvPr>
           <p:cNvPicPr>
             <a:picLocks noChangeAspect="1"/>
           </p:cNvPicPr>
@@ -13685,7 +13815,7 @@
       </p:pic>
       <p:sp>
         <p:nvSpPr>
-          <p:cNvPr id="6" name="Text 3"/>
+          <p:cNvPr id="7" name="Text 4"/>
           <p:cNvSpPr/>
           <p:nvPr/>
         </p:nvSpPr>
@@ -13907,8 +14037,47 @@
         </p:nvSpPr>
         <p:spPr>
           <a:xfrm>
-            <a:off x="5349240" y="1783080"/>
-            <a:ext cx="6522415" cy="4663440"/>
+            <a:off x="5349240" y="1737360"/>
+            <a:ext cx="6522415" cy="457200"/>
+          </a:xfrm>
+          <a:prstGeom prst="rect">
+            <a:avLst/>
+          </a:prstGeom>
+          <a:noFill/>
+          <a:ln/>
+        </p:spPr>
+        <p:txBody>
+          <a:bodyPr wrap="square" lIns="0" tIns="0" rIns="0" bIns="0" rtlCol="0" anchor="ctr"/>
+          <a:lstStyle/>
+          <a:p>
+            <a:pPr algn="l" indent="0" marL="0">
+              <a:buNone/>
+            </a:pPr>
+            <a:r>
+              <a:rPr lang="en-US" sz="3200" b="1" dirty="0">
+                <a:solidFill>
+                  <a:srgbClr val="990011"/>
+                </a:solidFill>
+                <a:latin typeface="Times New Roman" pitchFamily="34" charset="0"/>
+                <a:ea typeface="Times New Roman" pitchFamily="34" charset="-122"/>
+                <a:cs typeface="Times New Roman" pitchFamily="34" charset="-120"/>
+              </a:rPr>
+              <a:t>A) Activities</a:t>
+            </a:r>
+            <a:endParaRPr lang="en-US" sz="3200" dirty="0"/>
+          </a:p>
+        </p:txBody>
+      </p:sp>
+      <p:sp>
+        <p:nvSpPr>
+          <p:cNvPr id="6" name="Text 3"/>
+          <p:cNvSpPr/>
+          <p:nvPr/>
+        </p:nvSpPr>
+        <p:spPr>
+          <a:xfrm>
+            <a:off x="5349240" y="2240280"/>
+            <a:ext cx="6522415" cy="4206240"/>
           </a:xfrm>
           <a:prstGeom prst="rect">
             <a:avLst/>
@@ -14121,8 +14290,49 @@
         </p:nvSpPr>
         <p:spPr>
           <a:xfrm>
-            <a:off x="365760" y="1783080"/>
-            <a:ext cx="4846320" cy="4617720"/>
+            <a:off x="365760" y="1737360"/>
+            <a:ext cx="5120640" cy="457200"/>
+          </a:xfrm>
+          <a:prstGeom prst="rect">
+            <a:avLst/>
+          </a:prstGeom>
+          <a:noFill/>
+          <a:ln/>
+        </p:spPr>
+        <p:txBody>
+          <a:bodyPr wrap="square" lIns="0" tIns="0" rIns="0" bIns="0" rtlCol="0" anchor="ctr">
+            <a:normAutofit/>
+          </a:bodyPr>
+          <a:lstStyle/>
+          <a:p>
+            <a:pPr algn="l" indent="0" marL="0">
+              <a:buNone/>
+            </a:pPr>
+            <a:r>
+              <a:rPr lang="en-US" sz="3000" b="1" dirty="0">
+                <a:solidFill>
+                  <a:srgbClr val="990011"/>
+                </a:solidFill>
+                <a:latin typeface="Times New Roman" pitchFamily="34" charset="0"/>
+                <a:ea typeface="Times New Roman" pitchFamily="34" charset="-122"/>
+                <a:cs typeface="Times New Roman" pitchFamily="34" charset="-120"/>
+              </a:rPr>
+              <a:t>A) Activities</a:t>
+            </a:r>
+            <a:endParaRPr lang="en-US" sz="3000" dirty="0"/>
+          </a:p>
+        </p:txBody>
+      </p:sp>
+      <p:sp>
+        <p:nvSpPr>
+          <p:cNvPr id="5" name="Text 3"/>
+          <p:cNvSpPr/>
+          <p:nvPr/>
+        </p:nvSpPr>
+        <p:spPr>
+          <a:xfrm>
+            <a:off x="365760" y="2240280"/>
+            <a:ext cx="4846320" cy="4160520"/>
           </a:xfrm>
           <a:prstGeom prst="rect">
             <a:avLst/>
@@ -14176,7 +14386,7 @@
       </p:sp>
       <p:pic>
         <p:nvPicPr>
-          <p:cNvPr id="5" name="Image 0" descr="/home/claude/f4/img/v2/f2t_computer_class.jpg">    </p:cNvPr>
+          <p:cNvPr id="6" name="Image 0" descr="/home/claude/f4/img/v2/f2t_computer_class.jpg">    </p:cNvPr>
           <p:cNvPicPr>
             <a:picLocks noChangeAspect="1"/>
           </p:cNvPicPr>
@@ -14200,7 +14410,7 @@
       </p:pic>
       <p:sp>
         <p:nvSpPr>
-          <p:cNvPr id="6" name="Text 3"/>
+          <p:cNvPr id="7" name="Text 4"/>
           <p:cNvSpPr/>
           <p:nvPr/>
         </p:nvSpPr>
@@ -14422,8 +14632,47 @@
         </p:nvSpPr>
         <p:spPr>
           <a:xfrm>
-            <a:off x="5349240" y="1783080"/>
-            <a:ext cx="6522415" cy="4663440"/>
+            <a:off x="5349240" y="1737360"/>
+            <a:ext cx="6522415" cy="457200"/>
+          </a:xfrm>
+          <a:prstGeom prst="rect">
+            <a:avLst/>
+          </a:prstGeom>
+          <a:noFill/>
+          <a:ln/>
+        </p:spPr>
+        <p:txBody>
+          <a:bodyPr wrap="square" lIns="0" tIns="0" rIns="0" bIns="0" rtlCol="0" anchor="ctr"/>
+          <a:lstStyle/>
+          <a:p>
+            <a:pPr algn="l" indent="0" marL="0">
+              <a:buNone/>
+            </a:pPr>
+            <a:r>
+              <a:rPr lang="en-US" sz="3200" b="1" dirty="0">
+                <a:solidFill>
+                  <a:srgbClr val="990011"/>
+                </a:solidFill>
+                <a:latin typeface="Times New Roman" pitchFamily="34" charset="0"/>
+                <a:ea typeface="Times New Roman" pitchFamily="34" charset="-122"/>
+                <a:cs typeface="Times New Roman" pitchFamily="34" charset="-120"/>
+              </a:rPr>
+              <a:t>A) Activities</a:t>
+            </a:r>
+            <a:endParaRPr lang="en-US" sz="3200" dirty="0"/>
+          </a:p>
+        </p:txBody>
+      </p:sp>
+      <p:sp>
+        <p:nvSpPr>
+          <p:cNvPr id="6" name="Text 3"/>
+          <p:cNvSpPr/>
+          <p:nvPr/>
+        </p:nvSpPr>
+        <p:spPr>
+          <a:xfrm>
+            <a:off x="5349240" y="2240280"/>
+            <a:ext cx="6522415" cy="4206240"/>
           </a:xfrm>
           <a:prstGeom prst="rect">
             <a:avLst/>
@@ -14636,8 +14885,8 @@
         </p:nvSpPr>
         <p:spPr>
           <a:xfrm>
-            <a:off x="365760" y="1783080"/>
-            <a:ext cx="4846320" cy="4617720"/>
+            <a:off x="365760" y="1737360"/>
+            <a:ext cx="5120640" cy="457200"/>
           </a:xfrm>
           <a:prstGeom prst="rect">
             <a:avLst/>
@@ -14646,8 +14895,69 @@
           <a:ln/>
         </p:spPr>
         <p:txBody>
+          <a:bodyPr wrap="square" lIns="0" tIns="0" rIns="0" bIns="0" rtlCol="0" anchor="ctr">
+            <a:normAutofit/>
+          </a:bodyPr>
+          <a:lstStyle/>
+          <a:p>
+            <a:pPr algn="l" indent="0" marL="0">
+              <a:buNone/>
+            </a:pPr>
+            <a:r>
+              <a:rPr lang="en-US" sz="3000" b="1" dirty="0">
+                <a:solidFill>
+                  <a:srgbClr val="990011"/>
+                </a:solidFill>
+                <a:latin typeface="Times New Roman" pitchFamily="34" charset="0"/>
+                <a:ea typeface="Times New Roman" pitchFamily="34" charset="-122"/>
+                <a:cs typeface="Times New Roman" pitchFamily="34" charset="-120"/>
+              </a:rPr>
+              <a:t>B) Importance</a:t>
+            </a:r>
+            <a:endParaRPr lang="en-US" sz="3000" dirty="0"/>
+          </a:p>
+        </p:txBody>
+      </p:sp>
+      <p:sp>
+        <p:nvSpPr>
+          <p:cNvPr id="5" name="Text 3"/>
+          <p:cNvSpPr/>
+          <p:nvPr/>
+        </p:nvSpPr>
+        <p:spPr>
+          <a:xfrm>
+            <a:off x="365760" y="2240280"/>
+            <a:ext cx="4846320" cy="4160520"/>
+          </a:xfrm>
+          <a:prstGeom prst="rect">
+            <a:avLst/>
+          </a:prstGeom>
+          <a:noFill/>
+          <a:ln/>
+        </p:spPr>
+        <p:txBody>
           <a:bodyPr wrap="square" lIns="0" tIns="0" rIns="0" bIns="0" rtlCol="0" anchor="t"/>
           <a:lstStyle/>
+          <a:p>
+            <a:pPr algn="l" indent="0" marL="0">
+              <a:spcAft>
+                <a:spcPts val="800"/>
+              </a:spcAft>
+              <a:buNone/>
+            </a:pPr>
+            <a:r>
+              <a:rPr lang="en-US" sz="3600" i="1" dirty="0">
+                <a:solidFill>
+                  <a:srgbClr val="111111"/>
+                </a:solidFill>
+                <a:latin typeface="Times New Roman" pitchFamily="34" charset="0"/>
+                <a:ea typeface="Times New Roman" pitchFamily="34" charset="-122"/>
+                <a:cs typeface="Times New Roman" pitchFamily="34" charset="-120"/>
+              </a:rPr>
+              <a:t>The quaternary sector is important for the following reasons:</a:t>
+            </a:r>
+            <a:endParaRPr lang="en-US" sz="3600" dirty="0"/>
+          </a:p>
           <a:p>
             <a:pPr algn="l" marL="342900" indent="-342900">
               <a:spcAft>
@@ -14665,7 +14975,7 @@
                 <a:ea typeface="Times New Roman" pitchFamily="34" charset="-122"/>
                 <a:cs typeface="Times New Roman" pitchFamily="34" charset="-120"/>
               </a:rPr>
-              <a:t>Importance: </a:t>
+              <a:t>New seeds: </a:t>
             </a:r>
             <a:pPr algn="l" marL="342900" indent="-342900">
               <a:spcAft>
@@ -14683,7 +14993,7 @@
                 <a:ea typeface="Times New Roman" pitchFamily="34" charset="-122"/>
                 <a:cs typeface="Times New Roman" pitchFamily="34" charset="-120"/>
               </a:rPr>
-              <a:t>Research gives new seeds, machines and medicines to the other sectors.</a:t>
+              <a:t>Farmers get better harvests.</a:t>
             </a:r>
             <a:endParaRPr lang="en-US" sz="3600" dirty="0"/>
           </a:p>
@@ -14691,7 +15001,7 @@
       </p:sp>
       <p:pic>
         <p:nvPicPr>
-          <p:cNvPr id="5" name="Image 0" descr="/home/claude/f4/img/v2/quaternary_big.png">    </p:cNvPr>
+          <p:cNvPr id="6" name="Image 0" descr="/home/claude/f4/img/v2/quaternary_big.png">    </p:cNvPr>
           <p:cNvPicPr>
             <a:picLocks noChangeAspect="1"/>
           </p:cNvPicPr>
@@ -14715,7 +15025,7 @@
       </p:pic>
       <p:sp>
         <p:nvSpPr>
-          <p:cNvPr id="6" name="Text 3"/>
+          <p:cNvPr id="7" name="Text 4"/>
           <p:cNvSpPr/>
           <p:nvPr/>
         </p:nvSpPr>
@@ -15097,7 +15407,7 @@
                 <a:ea typeface="Calibri" pitchFamily="34" charset="-122"/>
                 <a:cs typeface="Calibri" pitchFamily="34" charset="-120"/>
               </a:rPr>
-              <a:t>FORMATIVE EVALUATION</a:t>
+              <a:t>BOARD SUMMARY</a:t>
             </a:r>
             <a:endParaRPr lang="en-US" sz="1400" dirty="0"/>
           </a:p>
@@ -15162,7 +15472,7 @@
                 <a:ea typeface="Times New Roman" pitchFamily="34" charset="-122"/>
                 <a:cs typeface="Times New Roman" pitchFamily="34" charset="-120"/>
               </a:rPr>
-              <a:t>Evaluation 1</a:t>
+              <a:t>Examples of Quaternary Activities</a:t>
             </a:r>
             <a:endParaRPr lang="en-US" sz="3600" dirty="0"/>
           </a:p>
@@ -15176,8 +15486,8 @@
         </p:nvSpPr>
         <p:spPr>
           <a:xfrm>
-            <a:off x="5349240" y="1783080"/>
-            <a:ext cx="6522415" cy="4663440"/>
+            <a:off x="5349240" y="1737360"/>
+            <a:ext cx="6522415" cy="457200"/>
           </a:xfrm>
           <a:prstGeom prst="rect">
             <a:avLst/>
@@ -15186,25 +15496,122 @@
           <a:ln/>
         </p:spPr>
         <p:txBody>
-          <a:bodyPr wrap="square" lIns="0" tIns="0" rIns="0" bIns="0" rtlCol="0" anchor="t"/>
+          <a:bodyPr wrap="square" lIns="0" tIns="0" rIns="0" bIns="0" rtlCol="0" anchor="ctr"/>
           <a:lstStyle/>
           <a:p>
             <a:pPr algn="l" indent="0" marL="0">
-              <a:spcAft>
-                <a:spcPts val="800"/>
-              </a:spcAft>
               <a:buNone/>
             </a:pPr>
             <a:r>
-              <a:rPr lang="en-US" sz="4000" dirty="0">
-                <a:solidFill>
-                  <a:srgbClr val="111111"/>
+              <a:rPr lang="en-US" sz="3200" b="1" dirty="0">
+                <a:solidFill>
+                  <a:srgbClr val="990011"/>
                 </a:solidFill>
                 <a:latin typeface="Times New Roman" pitchFamily="34" charset="0"/>
                 <a:ea typeface="Times New Roman" pitchFamily="34" charset="-122"/>
                 <a:cs typeface="Times New Roman" pitchFamily="34" charset="-120"/>
               </a:rPr>
-              <a:t>What is the quaternary sector?</a:t>
+              <a:t>B) Importance</a:t>
+            </a:r>
+            <a:endParaRPr lang="en-US" sz="3200" dirty="0"/>
+          </a:p>
+        </p:txBody>
+      </p:sp>
+      <p:sp>
+        <p:nvSpPr>
+          <p:cNvPr id="6" name="Text 3"/>
+          <p:cNvSpPr/>
+          <p:nvPr/>
+        </p:nvSpPr>
+        <p:spPr>
+          <a:xfrm>
+            <a:off x="5349240" y="2240280"/>
+            <a:ext cx="6522415" cy="4206240"/>
+          </a:xfrm>
+          <a:prstGeom prst="rect">
+            <a:avLst/>
+          </a:prstGeom>
+          <a:noFill/>
+          <a:ln/>
+        </p:spPr>
+        <p:txBody>
+          <a:bodyPr wrap="square" lIns="0" tIns="0" rIns="0" bIns="0" rtlCol="0" anchor="t"/>
+          <a:lstStyle/>
+          <a:p>
+            <a:pPr algn="l" marL="342900" indent="-342900">
+              <a:spcAft>
+                <a:spcPts val="800"/>
+              </a:spcAft>
+              <a:buSzPct val="100000"/>
+              <a:buChar char="•"/>
+            </a:pPr>
+            <a:r>
+              <a:rPr lang="en-US" sz="4000" b="1" dirty="0">
+                <a:solidFill>
+                  <a:srgbClr val="111111"/>
+                </a:solidFill>
+                <a:latin typeface="Times New Roman" pitchFamily="34" charset="0"/>
+                <a:ea typeface="Times New Roman" pitchFamily="34" charset="-122"/>
+                <a:cs typeface="Times New Roman" pitchFamily="34" charset="-120"/>
+              </a:rPr>
+              <a:t>New machines: </a:t>
+            </a:r>
+            <a:pPr algn="l" marL="342900" indent="-342900">
+              <a:spcAft>
+                <a:spcPts val="800"/>
+              </a:spcAft>
+              <a:buSzPct val="100000"/>
+              <a:buChar char="•"/>
+            </a:pPr>
+            <a:r>
+              <a:rPr lang="en-US" sz="4000" dirty="0">
+                <a:solidFill>
+                  <a:srgbClr val="111111"/>
+                </a:solidFill>
+                <a:latin typeface="Times New Roman" pitchFamily="34" charset="0"/>
+                <a:ea typeface="Times New Roman" pitchFamily="34" charset="-122"/>
+                <a:cs typeface="Times New Roman" pitchFamily="34" charset="-120"/>
+              </a:rPr>
+              <a:t>Industries produce more and faster.</a:t>
+            </a:r>
+            <a:endParaRPr lang="en-US" sz="4000" dirty="0"/>
+          </a:p>
+          <a:p>
+            <a:pPr algn="l" marL="342900" indent="-342900">
+              <a:spcAft>
+                <a:spcPts val="800"/>
+              </a:spcAft>
+              <a:buSzPct val="100000"/>
+              <a:buChar char="•"/>
+            </a:pPr>
+            <a:r>
+              <a:rPr lang="en-US" sz="4000" b="1" dirty="0">
+                <a:solidFill>
+                  <a:srgbClr val="111111"/>
+                </a:solidFill>
+                <a:latin typeface="Times New Roman" pitchFamily="34" charset="0"/>
+                <a:ea typeface="Times New Roman" pitchFamily="34" charset="-122"/>
+                <a:cs typeface="Times New Roman" pitchFamily="34" charset="-120"/>
+              </a:rPr>
+              <a:t>New medicines: </a:t>
+            </a:r>
+            <a:pPr algn="l" marL="342900" indent="-342900">
+              <a:spcAft>
+                <a:spcPts val="800"/>
+              </a:spcAft>
+              <a:buSzPct val="100000"/>
+              <a:buChar char="•"/>
+            </a:pPr>
+            <a:r>
+              <a:rPr lang="en-US" sz="4000" dirty="0">
+                <a:solidFill>
+                  <a:srgbClr val="111111"/>
+                </a:solidFill>
+                <a:latin typeface="Times New Roman" pitchFamily="34" charset="0"/>
+                <a:ea typeface="Times New Roman" pitchFamily="34" charset="-122"/>
+                <a:cs typeface="Times New Roman" pitchFamily="34" charset="-120"/>
+              </a:rPr>
+              <a:t>Doctors treat more diseases.</a:t>
             </a:r>
             <a:endParaRPr lang="en-US" sz="4000" dirty="0"/>
           </a:p>
@@ -15381,7 +15788,7 @@
                 <a:ea typeface="Times New Roman" pitchFamily="34" charset="-122"/>
                 <a:cs typeface="Times New Roman" pitchFamily="34" charset="-120"/>
               </a:rPr>
-              <a:t>Expected Answer</a:t>
+              <a:t>Evaluation 1</a:t>
             </a:r>
             <a:endParaRPr lang="en-US" sz="3600" dirty="0"/>
           </a:p>
@@ -15423,7 +15830,7 @@
                 <a:ea typeface="Times New Roman" pitchFamily="34" charset="-122"/>
                 <a:cs typeface="Times New Roman" pitchFamily="34" charset="-120"/>
               </a:rPr>
-              <a:t>The sector of knowledge and research.</a:t>
+              <a:t>What is the quaternary sector?</a:t>
             </a:r>
             <a:endParaRPr lang="en-US" sz="4000" dirty="0"/>
           </a:p>
@@ -15600,7 +16007,7 @@
                 <a:ea typeface="Times New Roman" pitchFamily="34" charset="-122"/>
                 <a:cs typeface="Times New Roman" pitchFamily="34" charset="-120"/>
               </a:rPr>
-              <a:t>Evaluation 2</a:t>
+              <a:t>Expected Answer</a:t>
             </a:r>
             <a:endParaRPr lang="en-US" sz="3600" dirty="0"/>
           </a:p>
@@ -15642,7 +16049,7 @@
                 <a:ea typeface="Times New Roman" pitchFamily="34" charset="-122"/>
                 <a:cs typeface="Times New Roman" pitchFamily="34" charset="-120"/>
               </a:rPr>
-              <a:t>Give one example of how research helps farmers.</a:t>
+              <a:t>The sector of knowledge and research.</a:t>
             </a:r>
             <a:endParaRPr lang="en-US" sz="4000" dirty="0"/>
           </a:p>
@@ -15819,7 +16226,7 @@
                 <a:ea typeface="Times New Roman" pitchFamily="34" charset="-122"/>
                 <a:cs typeface="Times New Roman" pitchFamily="34" charset="-120"/>
               </a:rPr>
-              <a:t>Expected Answer</a:t>
+              <a:t>Evaluation 2</a:t>
             </a:r>
             <a:endParaRPr lang="en-US" sz="3600" dirty="0"/>
           </a:p>
@@ -15861,7 +16268,7 @@
                 <a:ea typeface="Times New Roman" pitchFamily="34" charset="-122"/>
                 <a:cs typeface="Times New Roman" pitchFamily="34" charset="-120"/>
               </a:rPr>
-              <a:t>It gives better seeds that resist drought.</a:t>
+              <a:t>Give one example of how research helps farmers.</a:t>
             </a:r>
             <a:endParaRPr lang="en-US" sz="4000" dirty="0"/>
           </a:p>
@@ -15973,7 +16380,7 @@
                 <a:ea typeface="Calibri" pitchFamily="34" charset="-122"/>
                 <a:cs typeface="Calibri" pitchFamily="34" charset="-120"/>
               </a:rPr>
-              <a:t>REMEDIATION</a:t>
+              <a:t>FORMATIVE EVALUATION</a:t>
             </a:r>
             <a:endParaRPr lang="en-US" sz="1400" dirty="0"/>
           </a:p>
@@ -16038,7 +16445,7 @@
                 <a:ea typeface="Times New Roman" pitchFamily="34" charset="-122"/>
                 <a:cs typeface="Times New Roman" pitchFamily="34" charset="-120"/>
               </a:rPr>
-              <a:t>Remediation</a:t>
+              <a:t>Expected Answer</a:t>
             </a:r>
             <a:endParaRPr lang="en-US" sz="3600" dirty="0"/>
           </a:p>
@@ -16072,7 +16479,7 @@
               <a:buNone/>
             </a:pPr>
             <a:r>
-              <a:rPr lang="en-US" sz="4000" b="1" dirty="0">
+              <a:rPr lang="en-US" sz="4000" dirty="0">
                 <a:solidFill>
                   <a:srgbClr val="111111"/>
                 </a:solidFill>
@@ -16080,51 +16487,7 @@
                 <a:ea typeface="Times New Roman" pitchFamily="34" charset="-122"/>
                 <a:cs typeface="Times New Roman" pitchFamily="34" charset="-120"/>
               </a:rPr>
-              <a:t>Fill in the blanks:</a:t>
-            </a:r>
-            <a:endParaRPr lang="en-US" sz="4000" dirty="0"/>
-          </a:p>
-          <a:p>
-            <a:pPr algn="l" marL="342900" indent="-342900">
-              <a:spcAft>
-                <a:spcPts val="800"/>
-              </a:spcAft>
-              <a:buSzPct val="100000"/>
-              <a:buFont typeface="+mj-lt"/>
-              <a:buAutoNum type="arabicPeriod" startAt="1"/>
-            </a:pPr>
-            <a:r>
-              <a:rPr lang="en-US" sz="4000" dirty="0">
-                <a:solidFill>
-                  <a:srgbClr val="111111"/>
-                </a:solidFill>
-                <a:latin typeface="Times New Roman" pitchFamily="34" charset="0"/>
-                <a:ea typeface="Times New Roman" pitchFamily="34" charset="-122"/>
-                <a:cs typeface="Times New Roman" pitchFamily="34" charset="-120"/>
-              </a:rPr>
-              <a:t>The sector of knowledge and research is the ______ sector.</a:t>
-            </a:r>
-            <a:endParaRPr lang="en-US" sz="4000" dirty="0"/>
-          </a:p>
-          <a:p>
-            <a:pPr algn="l" marL="342900" indent="-342900">
-              <a:spcAft>
-                <a:spcPts val="800"/>
-              </a:spcAft>
-              <a:buSzPct val="100000"/>
-              <a:buFont typeface="+mj-lt"/>
-              <a:buAutoNum type="arabicPeriod" startAt="1"/>
-            </a:pPr>
-            <a:r>
-              <a:rPr lang="en-US" sz="4000" dirty="0">
-                <a:solidFill>
-                  <a:srgbClr val="111111"/>
-                </a:solidFill>
-                <a:latin typeface="Times New Roman" pitchFamily="34" charset="0"/>
-                <a:ea typeface="Times New Roman" pitchFamily="34" charset="-122"/>
-                <a:cs typeface="Times New Roman" pitchFamily="34" charset="-120"/>
-              </a:rPr>
-              <a:t>The research centre for farming in Cameroon is ______.</a:t>
+              <a:t>It gives better seeds that resist drought.</a:t>
             </a:r>
             <a:endParaRPr lang="en-US" sz="4000" dirty="0"/>
           </a:p>
@@ -16301,7 +16664,7 @@
                 <a:ea typeface="Times New Roman" pitchFamily="34" charset="-122"/>
                 <a:cs typeface="Times New Roman" pitchFamily="34" charset="-120"/>
               </a:rPr>
-              <a:t>Remediation (continued)</a:t>
+              <a:t>Remediation</a:t>
             </a:r>
             <a:endParaRPr lang="en-US" sz="3600" dirty="0"/>
           </a:p>
@@ -16327,6 +16690,26 @@
         <p:txBody>
           <a:bodyPr wrap="square" lIns="0" tIns="0" rIns="0" bIns="0" rtlCol="0" anchor="t"/>
           <a:lstStyle/>
+          <a:p>
+            <a:pPr algn="l" indent="0" marL="0">
+              <a:spcAft>
+                <a:spcPts val="800"/>
+              </a:spcAft>
+              <a:buNone/>
+            </a:pPr>
+            <a:r>
+              <a:rPr lang="en-US" sz="4000" b="1" dirty="0">
+                <a:solidFill>
+                  <a:srgbClr val="111111"/>
+                </a:solidFill>
+                <a:latin typeface="Times New Roman" pitchFamily="34" charset="0"/>
+                <a:ea typeface="Times New Roman" pitchFamily="34" charset="-122"/>
+                <a:cs typeface="Times New Roman" pitchFamily="34" charset="-120"/>
+              </a:rPr>
+              <a:t>Fill in the blanks:</a:t>
+            </a:r>
+            <a:endParaRPr lang="en-US" sz="4000" dirty="0"/>
+          </a:p>
           <a:p>
             <a:pPr algn="l" marL="342900" indent="-342900">
               <a:spcAft>
@@ -16345,7 +16728,29 @@
                 <a:ea typeface="Times New Roman" pitchFamily="34" charset="-122"/>
                 <a:cs typeface="Times New Roman" pitchFamily="34" charset="-120"/>
               </a:rPr>
-              <a:t>Computers, phones and the internet are called ______.</a:t>
+              <a:t>The sector of knowledge and research is the ______ sector.</a:t>
+            </a:r>
+            <a:endParaRPr lang="en-US" sz="4000" dirty="0"/>
+          </a:p>
+          <a:p>
+            <a:pPr algn="l" marL="342900" indent="-342900">
+              <a:spcAft>
+                <a:spcPts val="800"/>
+              </a:spcAft>
+              <a:buSzPct val="100000"/>
+              <a:buFont typeface="+mj-lt"/>
+              <a:buAutoNum type="arabicPeriod" startAt="1"/>
+            </a:pPr>
+            <a:r>
+              <a:rPr lang="en-US" sz="4000" dirty="0">
+                <a:solidFill>
+                  <a:srgbClr val="111111"/>
+                </a:solidFill>
+                <a:latin typeface="Times New Roman" pitchFamily="34" charset="0"/>
+                <a:ea typeface="Times New Roman" pitchFamily="34" charset="-122"/>
+                <a:cs typeface="Times New Roman" pitchFamily="34" charset="-120"/>
+              </a:rPr>
+              <a:t>The research centre for farming in Cameroon is ______.</a:t>
             </a:r>
             <a:endParaRPr lang="en-US" sz="4000" dirty="0"/>
           </a:p>
@@ -16457,7 +16862,7 @@
                 <a:ea typeface="Calibri" pitchFamily="34" charset="-122"/>
                 <a:cs typeface="Calibri" pitchFamily="34" charset="-120"/>
               </a:rPr>
-              <a:t>HOMEWORK</a:t>
+              <a:t>REMEDIATION</a:t>
             </a:r>
             <a:endParaRPr lang="en-US" sz="1400" dirty="0"/>
           </a:p>
@@ -16522,7 +16927,7 @@
                 <a:ea typeface="Times New Roman" pitchFamily="34" charset="-122"/>
                 <a:cs typeface="Times New Roman" pitchFamily="34" charset="-120"/>
               </a:rPr>
-              <a:t>Homework</a:t>
+              <a:t>Remediation (continued)</a:t>
             </a:r>
             <a:endParaRPr lang="en-US" sz="3600" dirty="0"/>
           </a:p>
@@ -16549,11 +16954,13 @@
           <a:bodyPr wrap="square" lIns="0" tIns="0" rIns="0" bIns="0" rtlCol="0" anchor="t"/>
           <a:lstStyle/>
           <a:p>
-            <a:pPr algn="l" indent="0" marL="0">
+            <a:pPr algn="l" marL="342900" indent="-342900">
               <a:spcAft>
                 <a:spcPts val="800"/>
               </a:spcAft>
-              <a:buNone/>
+              <a:buSzPct val="100000"/>
+              <a:buFont typeface="+mj-lt"/>
+              <a:buAutoNum type="arabicPeriod" startAt="1"/>
             </a:pPr>
             <a:r>
               <a:rPr lang="en-US" sz="4000" dirty="0">
@@ -16564,7 +16971,7 @@
                 <a:ea typeface="Times New Roman" pitchFamily="34" charset="-122"/>
                 <a:cs typeface="Times New Roman" pitchFamily="34" charset="-120"/>
               </a:rPr>
-              <a:t>Name the four oceans and seas around Africa.</a:t>
+              <a:t>Computers, phones and the internet are called ______.</a:t>
             </a:r>
             <a:endParaRPr lang="en-US" sz="4000" dirty="0"/>
           </a:p>
@@ -16676,7 +17083,7 @@
                 <a:ea typeface="Calibri" pitchFamily="34" charset="-122"/>
                 <a:cs typeface="Calibri" pitchFamily="34" charset="-120"/>
               </a:rPr>
-              <a:t>NEXT LESSON</a:t>
+              <a:t>HOMEWORK</a:t>
             </a:r>
             <a:endParaRPr lang="en-US" sz="1400" dirty="0"/>
           </a:p>
@@ -16741,7 +17148,7 @@
                 <a:ea typeface="Times New Roman" pitchFamily="34" charset="-122"/>
                 <a:cs typeface="Times New Roman" pitchFamily="34" charset="-120"/>
               </a:rPr>
-              <a:t>Next Lesson</a:t>
+              <a:t>Homework</a:t>
             </a:r>
             <a:endParaRPr lang="en-US" sz="3600" dirty="0"/>
           </a:p>
@@ -16765,17 +17172,17 @@
           <a:ln/>
         </p:spPr>
         <p:txBody>
-          <a:bodyPr wrap="square" lIns="0" tIns="0" rIns="0" bIns="0" rtlCol="0" anchor="ctr"/>
-          <a:lstStyle/>
-          <a:p>
-            <a:pPr algn="ctr" indent="0" marL="0">
+          <a:bodyPr wrap="square" lIns="0" tIns="0" rIns="0" bIns="0" rtlCol="0" anchor="t"/>
+          <a:lstStyle/>
+          <a:p>
+            <a:pPr algn="l" indent="0" marL="0">
               <a:spcAft>
                 <a:spcPts val="800"/>
               </a:spcAft>
               <a:buNone/>
             </a:pPr>
             <a:r>
-              <a:rPr lang="en-US" sz="4000" b="1" dirty="0">
+              <a:rPr lang="en-US" sz="4000" dirty="0">
                 <a:solidFill>
                   <a:srgbClr val="111111"/>
                 </a:solidFill>
@@ -16783,27 +17190,7 @@
                 <a:ea typeface="Times New Roman" pitchFamily="34" charset="-122"/>
                 <a:cs typeface="Times New Roman" pitchFamily="34" charset="-120"/>
               </a:rPr>
-              <a:t>Our next lesson will be on:</a:t>
-            </a:r>
-            <a:endParaRPr lang="en-US" sz="4000" dirty="0"/>
-          </a:p>
-          <a:p>
-            <a:pPr algn="ctr" indent="0" marL="0">
-              <a:spcAft>
-                <a:spcPts val="800"/>
-              </a:spcAft>
-              <a:buNone/>
-            </a:pPr>
-            <a:r>
-              <a:rPr lang="en-US" sz="4000" b="1" dirty="0">
-                <a:solidFill>
-                  <a:srgbClr val="990011"/>
-                </a:solidFill>
-                <a:latin typeface="Times New Roman" pitchFamily="34" charset="0"/>
-                <a:ea typeface="Times New Roman" pitchFamily="34" charset="-122"/>
-                <a:cs typeface="Times New Roman" pitchFamily="34" charset="-120"/>
-              </a:rPr>
-              <a:t>Lesson 6 (Part 1): Africa: Introduction (Location and Physical Characteristics)</a:t>
+              <a:t>Name the four oceans and seas around Africa.</a:t>
             </a:r>
             <a:endParaRPr lang="en-US" sz="4000" dirty="0"/>
           </a:p>
@@ -16915,6 +17302,245 @@
                 <a:ea typeface="Calibri" pitchFamily="34" charset="-122"/>
                 <a:cs typeface="Calibri" pitchFamily="34" charset="-120"/>
               </a:rPr>
+              <a:t>NEXT LESSON</a:t>
+            </a:r>
+            <a:endParaRPr lang="en-US" sz="1400" dirty="0"/>
+          </a:p>
+        </p:txBody>
+      </p:sp>
+      <p:pic>
+        <p:nvPicPr>
+          <p:cNvPr id="3" name="Image 0" descr="/home/claude/f4/img/minesec_sheet.png">    </p:cNvPr>
+          <p:cNvPicPr>
+            <a:picLocks noChangeAspect="1"/>
+          </p:cNvPicPr>
+          <p:nvPr/>
+        </p:nvPicPr>
+        <p:blipFill>
+          <a:blip r:embed="rId1"/>
+          <a:stretch>
+            <a:fillRect/>
+          </a:stretch>
+        </p:blipFill>
+        <p:spPr>
+          <a:xfrm>
+            <a:off x="0" y="658368"/>
+            <a:ext cx="5120640" cy="5833872"/>
+          </a:xfrm>
+          <a:prstGeom prst="rect">
+            <a:avLst/>
+          </a:prstGeom>
+        </p:spPr>
+      </p:pic>
+      <p:sp>
+        <p:nvSpPr>
+          <p:cNvPr id="4" name="Text 1"/>
+          <p:cNvSpPr/>
+          <p:nvPr/>
+        </p:nvSpPr>
+        <p:spPr>
+          <a:xfrm>
+            <a:off x="5349240" y="1005840"/>
+            <a:ext cx="6522415" cy="731520"/>
+          </a:xfrm>
+          <a:prstGeom prst="rect">
+            <a:avLst/>
+          </a:prstGeom>
+          <a:noFill/>
+          <a:ln/>
+        </p:spPr>
+        <p:txBody>
+          <a:bodyPr wrap="square" lIns="0" tIns="0" rIns="0" bIns="0" rtlCol="0" anchor="ctr">
+            <a:normAutofit/>
+          </a:bodyPr>
+          <a:lstStyle/>
+          <a:p>
+            <a:pPr algn="ctr" indent="0" marL="0">
+              <a:buNone/>
+            </a:pPr>
+            <a:r>
+              <a:rPr lang="en-US" sz="3600" b="1" dirty="0">
+                <a:solidFill>
+                  <a:srgbClr val="990011"/>
+                </a:solidFill>
+                <a:latin typeface="Times New Roman" pitchFamily="34" charset="0"/>
+                <a:ea typeface="Times New Roman" pitchFamily="34" charset="-122"/>
+                <a:cs typeface="Times New Roman" pitchFamily="34" charset="-120"/>
+              </a:rPr>
+              <a:t>Next Lesson</a:t>
+            </a:r>
+            <a:endParaRPr lang="en-US" sz="3600" dirty="0"/>
+          </a:p>
+        </p:txBody>
+      </p:sp>
+      <p:sp>
+        <p:nvSpPr>
+          <p:cNvPr id="5" name="Text 2"/>
+          <p:cNvSpPr/>
+          <p:nvPr/>
+        </p:nvSpPr>
+        <p:spPr>
+          <a:xfrm>
+            <a:off x="5349240" y="1783080"/>
+            <a:ext cx="6522415" cy="4663440"/>
+          </a:xfrm>
+          <a:prstGeom prst="rect">
+            <a:avLst/>
+          </a:prstGeom>
+          <a:noFill/>
+          <a:ln/>
+        </p:spPr>
+        <p:txBody>
+          <a:bodyPr wrap="square" lIns="0" tIns="0" rIns="0" bIns="0" rtlCol="0" anchor="ctr"/>
+          <a:lstStyle/>
+          <a:p>
+            <a:pPr algn="ctr" indent="0" marL="0">
+              <a:spcAft>
+                <a:spcPts val="800"/>
+              </a:spcAft>
+              <a:buNone/>
+            </a:pPr>
+            <a:r>
+              <a:rPr lang="en-US" sz="4000" b="1" dirty="0">
+                <a:solidFill>
+                  <a:srgbClr val="111111"/>
+                </a:solidFill>
+                <a:latin typeface="Times New Roman" pitchFamily="34" charset="0"/>
+                <a:ea typeface="Times New Roman" pitchFamily="34" charset="-122"/>
+                <a:cs typeface="Times New Roman" pitchFamily="34" charset="-120"/>
+              </a:rPr>
+              <a:t>Our next lesson will be on:</a:t>
+            </a:r>
+            <a:endParaRPr lang="en-US" sz="4000" dirty="0"/>
+          </a:p>
+          <a:p>
+            <a:pPr algn="ctr" indent="0" marL="0">
+              <a:spcAft>
+                <a:spcPts val="800"/>
+              </a:spcAft>
+              <a:buNone/>
+            </a:pPr>
+            <a:r>
+              <a:rPr lang="en-US" sz="4000" b="1" dirty="0">
+                <a:solidFill>
+                  <a:srgbClr val="990011"/>
+                </a:solidFill>
+                <a:latin typeface="Times New Roman" pitchFamily="34" charset="0"/>
+                <a:ea typeface="Times New Roman" pitchFamily="34" charset="-122"/>
+                <a:cs typeface="Times New Roman" pitchFamily="34" charset="-120"/>
+              </a:rPr>
+              <a:t>Lesson 6 (Part 1): Africa: Introduction (Location and Physical Characteristics)</a:t>
+            </a:r>
+            <a:endParaRPr lang="en-US" sz="4000" dirty="0"/>
+          </a:p>
+        </p:txBody>
+      </p:sp>
+      <p:sp>
+        <p:nvSpPr>
+          <p:cNvPr id="25" name="Slide Number Placeholder 0"/>
+          <p:cNvSpPr>
+            <a:spLocks noGrp="1"/>
+          </p:cNvSpPr>
+          <p:nvPr>
+            <p:ph type="sldNum" sz="quarter" idx="4294967295"/>
+          </p:nvPr>
+        </p:nvSpPr>
+        <p:spPr>
+          <a:xfrm>
+            <a:off x="27432" y="91440"/>
+            <a:ext cx="585216" cy="475488"/>
+          </a:xfrm>
+          <a:prstGeom prst="rect">
+            <a:avLst/>
+          </a:prstGeom>
+          <a:extLst>
+            <a:ext uri="{C572A759-6A51-4108-AA02-DFA0A04FC94B}">
+              <ma14:wrappingTextBoxFlag xmlns:ma14="http://schemas.microsoft.com/office/mac/drawingml/2011/main" val="0"/>
+            </a:ext>
+          </a:extLst>
+        </p:spPr>
+        <p:txBody>
+          <a:bodyPr/>
+          <a:lstStyle>
+            <a:lvl1pPr>
+              <a:defRPr sz="2000">
+                <a:solidFill>
+                  <a:srgbClr val="FFFFFF"/>
+                </a:solidFill>
+                <a:latin typeface="Calibri"/>
+                <a:ea typeface="Calibri"/>
+                <a:cs typeface="Calibri"/>
+              </a:defRPr>
+            </a:lvl1pPr>
+          </a:lstStyle>
+          <a:p>
+            <a:pPr algn="ctr"/>
+            <a:fld id="{F7021451-1387-4CA6-816F-3879F97B5CBC}" type="slidenum">
+              <a:rPr b="1" lang="en-US"/>
+              <a:t>48</a:t>
+            </a:fld>
+            <a:endParaRPr lang="en-US"/>
+          </a:p>
+        </p:txBody>
+      </p:sp>
+    </p:spTree>
+  </p:cSld>
+  <p:clrMapOvr>
+    <a:masterClrMapping/>
+  </p:clrMapOvr>
+</p:sld>
+</file>
+
+<file path=ppt/slides/slide49.xml><?xml version="1.0" encoding="utf-8"?>
+<p:sld xmlns:a="http://schemas.openxmlformats.org/drawingml/2006/main" xmlns:r="http://schemas.openxmlformats.org/officeDocument/2006/relationships" xmlns:p="http://schemas.openxmlformats.org/presentationml/2006/main">
+  <p:cSld name="Slide 49">
+    <p:spTree>
+      <p:nvGrpSpPr>
+        <p:cNvPr id="1" name=""/>
+        <p:cNvGrpSpPr/>
+        <p:nvPr/>
+      </p:nvGrpSpPr>
+      <p:grpSpPr>
+        <a:xfrm>
+          <a:off x="0" y="0"/>
+          <a:ext cx="0" cy="0"/>
+          <a:chOff x="0" y="0"/>
+          <a:chExt cx="0" cy="0"/>
+        </a:xfrm>
+      </p:grpSpPr>
+      <p:sp>
+        <p:nvSpPr>
+          <p:cNvPr id="2" name="Text 0"/>
+          <p:cNvSpPr/>
+          <p:nvPr/>
+        </p:nvSpPr>
+        <p:spPr>
+          <a:xfrm>
+            <a:off x="457200" y="713232"/>
+            <a:ext cx="11368735" cy="274320"/>
+          </a:xfrm>
+          <a:prstGeom prst="rect">
+            <a:avLst/>
+          </a:prstGeom>
+          <a:noFill/>
+          <a:ln/>
+        </p:spPr>
+        <p:txBody>
+          <a:bodyPr wrap="square" lIns="0" tIns="0" rIns="0" bIns="0" rtlCol="0" anchor="ctr"/>
+          <a:lstStyle/>
+          <a:p>
+            <a:pPr algn="r" indent="0" marL="0">
+              <a:buNone/>
+            </a:pPr>
+            <a:r>
+              <a:rPr lang="en-US" sz="1400" b="1" dirty="0">
+                <a:solidFill>
+                  <a:srgbClr val="1C3F6E"/>
+                </a:solidFill>
+                <a:latin typeface="Calibri" pitchFamily="34" charset="0"/>
+                <a:ea typeface="Calibri" pitchFamily="34" charset="-122"/>
+                <a:cs typeface="Calibri" pitchFamily="34" charset="-120"/>
+              </a:rPr>
               <a:t>BILINGUAL GAME</a:t>
             </a:r>
             <a:endParaRPr lang="en-US" sz="1400" dirty="0"/>
@@ -16962,7 +17588,7 @@
       </p:sp>
       <p:graphicFrame>
         <p:nvGraphicFramePr>
-          <p:cNvPr id="49" name="Table 0"/>
+          <p:cNvPr id="50" name="Table 0"/>
           <p:cNvGraphicFramePr>
             <a:graphicFrameLocks noGrp="1"/>
           </p:cNvGraphicFramePr>
@@ -18274,7 +18900,7 @@
             <a:pPr algn="ctr"/>
             <a:fld id="{F7021451-1387-4CA6-816F-3879F97B5CBC}" type="slidenum">
               <a:rPr b="1" lang="en-US"/>
-              <a:t>48</a:t>
+              <a:t>49</a:t>
             </a:fld>
             <a:endParaRPr lang="en-US"/>
           </a:p>
@@ -18288,9 +18914,9 @@
 </p:sld>
 </file>
 
-<file path=ppt/slides/slide49.xml><?xml version="1.0" encoding="utf-8"?>
+<file path=ppt/slides/slide5.xml><?xml version="1.0" encoding="utf-8"?>
 <p:sld xmlns:a="http://schemas.openxmlformats.org/drawingml/2006/main" xmlns:r="http://schemas.openxmlformats.org/officeDocument/2006/relationships" xmlns:p="http://schemas.openxmlformats.org/presentationml/2006/main">
-  <p:cSld name="Slide 49">
+  <p:cSld name="Slide 5">
     <p:spTree>
       <p:nvGrpSpPr>
         <p:cNvPr id="1" name=""/>
@@ -18338,6 +18964,225 @@
                 <a:ea typeface="Calibri" pitchFamily="34" charset="-122"/>
                 <a:cs typeface="Calibri" pitchFamily="34" charset="-120"/>
               </a:rPr>
+              <a:t>HOMEWORK CORRECTION</a:t>
+            </a:r>
+            <a:endParaRPr lang="en-US" sz="1400" dirty="0"/>
+          </a:p>
+        </p:txBody>
+      </p:sp>
+      <p:pic>
+        <p:nvPicPr>
+          <p:cNvPr id="3" name="Image 0" descr="/home/claude/f4/img/minesec_sheet.png">    </p:cNvPr>
+          <p:cNvPicPr>
+            <a:picLocks noChangeAspect="1"/>
+          </p:cNvPicPr>
+          <p:nvPr/>
+        </p:nvPicPr>
+        <p:blipFill>
+          <a:blip r:embed="rId1"/>
+          <a:stretch>
+            <a:fillRect/>
+          </a:stretch>
+        </p:blipFill>
+        <p:spPr>
+          <a:xfrm>
+            <a:off x="0" y="658368"/>
+            <a:ext cx="5120640" cy="5833872"/>
+          </a:xfrm>
+          <a:prstGeom prst="rect">
+            <a:avLst/>
+          </a:prstGeom>
+        </p:spPr>
+      </p:pic>
+      <p:sp>
+        <p:nvSpPr>
+          <p:cNvPr id="4" name="Text 1"/>
+          <p:cNvSpPr/>
+          <p:nvPr/>
+        </p:nvSpPr>
+        <p:spPr>
+          <a:xfrm>
+            <a:off x="5349240" y="1005840"/>
+            <a:ext cx="6522415" cy="731520"/>
+          </a:xfrm>
+          <a:prstGeom prst="rect">
+            <a:avLst/>
+          </a:prstGeom>
+          <a:noFill/>
+          <a:ln/>
+        </p:spPr>
+        <p:txBody>
+          <a:bodyPr wrap="square" lIns="0" tIns="0" rIns="0" bIns="0" rtlCol="0" anchor="ctr">
+            <a:normAutofit/>
+          </a:bodyPr>
+          <a:lstStyle/>
+          <a:p>
+            <a:pPr algn="ctr" indent="0" marL="0">
+              <a:buNone/>
+            </a:pPr>
+            <a:r>
+              <a:rPr lang="en-US" sz="3600" b="1" dirty="0">
+                <a:solidFill>
+                  <a:srgbClr val="990011"/>
+                </a:solidFill>
+                <a:latin typeface="Times New Roman" pitchFamily="34" charset="0"/>
+                <a:ea typeface="Times New Roman" pitchFamily="34" charset="-122"/>
+                <a:cs typeface="Times New Roman" pitchFamily="34" charset="-120"/>
+              </a:rPr>
+              <a:t>Correction: Possible Answer</a:t>
+            </a:r>
+            <a:endParaRPr lang="en-US" sz="3600" dirty="0"/>
+          </a:p>
+        </p:txBody>
+      </p:sp>
+      <p:sp>
+        <p:nvSpPr>
+          <p:cNvPr id="5" name="Text 2"/>
+          <p:cNvSpPr/>
+          <p:nvPr/>
+        </p:nvSpPr>
+        <p:spPr>
+          <a:xfrm>
+            <a:off x="5349240" y="1783080"/>
+            <a:ext cx="6522415" cy="4663440"/>
+          </a:xfrm>
+          <a:prstGeom prst="rect">
+            <a:avLst/>
+          </a:prstGeom>
+          <a:noFill/>
+          <a:ln/>
+        </p:spPr>
+        <p:txBody>
+          <a:bodyPr wrap="square" lIns="0" tIns="0" rIns="0" bIns="0" rtlCol="0" anchor="t"/>
+          <a:lstStyle/>
+          <a:p>
+            <a:pPr algn="l" indent="0" marL="0">
+              <a:spcAft>
+                <a:spcPts val="800"/>
+              </a:spcAft>
+              <a:buNone/>
+            </a:pPr>
+            <a:r>
+              <a:rPr lang="en-US" sz="4000" dirty="0">
+                <a:solidFill>
+                  <a:srgbClr val="111111"/>
+                </a:solidFill>
+                <a:latin typeface="Times New Roman" pitchFamily="34" charset="0"/>
+                <a:ea typeface="Times New Roman" pitchFamily="34" charset="-122"/>
+                <a:cs typeface="Times New Roman" pitchFamily="34" charset="-120"/>
+              </a:rPr>
+              <a:t>IRAD.</a:t>
+            </a:r>
+            <a:endParaRPr lang="en-US" sz="4000" dirty="0"/>
+          </a:p>
+        </p:txBody>
+      </p:sp>
+      <p:sp>
+        <p:nvSpPr>
+          <p:cNvPr id="25" name="Slide Number Placeholder 0"/>
+          <p:cNvSpPr>
+            <a:spLocks noGrp="1"/>
+          </p:cNvSpPr>
+          <p:nvPr>
+            <p:ph type="sldNum" sz="quarter" idx="4294967295"/>
+          </p:nvPr>
+        </p:nvSpPr>
+        <p:spPr>
+          <a:xfrm>
+            <a:off x="27432" y="91440"/>
+            <a:ext cx="585216" cy="475488"/>
+          </a:xfrm>
+          <a:prstGeom prst="rect">
+            <a:avLst/>
+          </a:prstGeom>
+          <a:extLst>
+            <a:ext uri="{C572A759-6A51-4108-AA02-DFA0A04FC94B}">
+              <ma14:wrappingTextBoxFlag xmlns:ma14="http://schemas.microsoft.com/office/mac/drawingml/2011/main" val="0"/>
+            </a:ext>
+          </a:extLst>
+        </p:spPr>
+        <p:txBody>
+          <a:bodyPr/>
+          <a:lstStyle>
+            <a:lvl1pPr>
+              <a:defRPr sz="2000">
+                <a:solidFill>
+                  <a:srgbClr val="FFFFFF"/>
+                </a:solidFill>
+                <a:latin typeface="Calibri"/>
+                <a:ea typeface="Calibri"/>
+                <a:cs typeface="Calibri"/>
+              </a:defRPr>
+            </a:lvl1pPr>
+          </a:lstStyle>
+          <a:p>
+            <a:pPr algn="ctr"/>
+            <a:fld id="{F7021451-1387-4CA6-816F-3879F97B5CBC}" type="slidenum">
+              <a:rPr b="1" lang="en-US"/>
+              <a:t>5</a:t>
+            </a:fld>
+            <a:endParaRPr lang="en-US"/>
+          </a:p>
+        </p:txBody>
+      </p:sp>
+    </p:spTree>
+  </p:cSld>
+  <p:clrMapOvr>
+    <a:masterClrMapping/>
+  </p:clrMapOvr>
+</p:sld>
+</file>
+
+<file path=ppt/slides/slide50.xml><?xml version="1.0" encoding="utf-8"?>
+<p:sld xmlns:a="http://schemas.openxmlformats.org/drawingml/2006/main" xmlns:r="http://schemas.openxmlformats.org/officeDocument/2006/relationships" xmlns:p="http://schemas.openxmlformats.org/presentationml/2006/main">
+  <p:cSld name="Slide 50">
+    <p:spTree>
+      <p:nvGrpSpPr>
+        <p:cNvPr id="1" name=""/>
+        <p:cNvGrpSpPr/>
+        <p:nvPr/>
+      </p:nvGrpSpPr>
+      <p:grpSpPr>
+        <a:xfrm>
+          <a:off x="0" y="0"/>
+          <a:ext cx="0" cy="0"/>
+          <a:chOff x="0" y="0"/>
+          <a:chExt cx="0" cy="0"/>
+        </a:xfrm>
+      </p:grpSpPr>
+      <p:sp>
+        <p:nvSpPr>
+          <p:cNvPr id="2" name="Text 0"/>
+          <p:cNvSpPr/>
+          <p:nvPr/>
+        </p:nvSpPr>
+        <p:spPr>
+          <a:xfrm>
+            <a:off x="457200" y="713232"/>
+            <a:ext cx="11368735" cy="274320"/>
+          </a:xfrm>
+          <a:prstGeom prst="rect">
+            <a:avLst/>
+          </a:prstGeom>
+          <a:noFill/>
+          <a:ln/>
+        </p:spPr>
+        <p:txBody>
+          <a:bodyPr wrap="square" lIns="0" tIns="0" rIns="0" bIns="0" rtlCol="0" anchor="ctr"/>
+          <a:lstStyle/>
+          <a:p>
+            <a:pPr algn="r" indent="0" marL="0">
+              <a:buNone/>
+            </a:pPr>
+            <a:r>
+              <a:rPr lang="en-US" sz="1400" b="1" dirty="0">
+                <a:solidFill>
+                  <a:srgbClr val="1C3F6E"/>
+                </a:solidFill>
+                <a:latin typeface="Calibri" pitchFamily="34" charset="0"/>
+                <a:ea typeface="Calibri" pitchFamily="34" charset="-122"/>
+                <a:cs typeface="Calibri" pitchFamily="34" charset="-120"/>
+              </a:rPr>
               <a:t>LOGBOOK</a:t>
             </a:r>
             <a:endParaRPr lang="en-US" sz="1400" dirty="0"/>
@@ -18385,7 +19230,7 @@
       </p:sp>
       <p:graphicFrame>
         <p:nvGraphicFramePr>
-          <p:cNvPr id="50" name="Table 0"/>
+          <p:cNvPr id="51" name="Table 0"/>
           <p:cNvGraphicFramePr>
             <a:graphicFrameLocks noGrp="1"/>
           </p:cNvGraphicFramePr>
@@ -19007,7 +19852,7 @@
             <a:pPr algn="ctr"/>
             <a:fld id="{F7021451-1387-4CA6-816F-3879F97B5CBC}" type="slidenum">
               <a:rPr b="1" lang="en-US"/>
-              <a:t>49</a:t>
+              <a:t>50</a:t>
             </a:fld>
             <a:endParaRPr lang="en-US"/>
           </a:p>
@@ -19021,9 +19866,9 @@
 </p:sld>
 </file>
 
-<file path=ppt/slides/slide5.xml><?xml version="1.0" encoding="utf-8"?>
+<file path=ppt/slides/slide51.xml><?xml version="1.0" encoding="utf-8"?>
 <p:sld xmlns:a="http://schemas.openxmlformats.org/drawingml/2006/main" xmlns:r="http://schemas.openxmlformats.org/officeDocument/2006/relationships" xmlns:p="http://schemas.openxmlformats.org/presentationml/2006/main">
-  <p:cSld name="Slide 5">
+  <p:cSld name="Slide 51">
     <p:spTree>
       <p:nvGrpSpPr>
         <p:cNvPr id="1" name=""/>
@@ -19071,225 +19916,6 @@
                 <a:ea typeface="Calibri" pitchFamily="34" charset="-122"/>
                 <a:cs typeface="Calibri" pitchFamily="34" charset="-120"/>
               </a:rPr>
-              <a:t>HOMEWORK CORRECTION</a:t>
-            </a:r>
-            <a:endParaRPr lang="en-US" sz="1400" dirty="0"/>
-          </a:p>
-        </p:txBody>
-      </p:sp>
-      <p:pic>
-        <p:nvPicPr>
-          <p:cNvPr id="3" name="Image 0" descr="/home/claude/f4/img/minesec_sheet.png">    </p:cNvPr>
-          <p:cNvPicPr>
-            <a:picLocks noChangeAspect="1"/>
-          </p:cNvPicPr>
-          <p:nvPr/>
-        </p:nvPicPr>
-        <p:blipFill>
-          <a:blip r:embed="rId1"/>
-          <a:stretch>
-            <a:fillRect/>
-          </a:stretch>
-        </p:blipFill>
-        <p:spPr>
-          <a:xfrm>
-            <a:off x="0" y="658368"/>
-            <a:ext cx="5120640" cy="5833872"/>
-          </a:xfrm>
-          <a:prstGeom prst="rect">
-            <a:avLst/>
-          </a:prstGeom>
-        </p:spPr>
-      </p:pic>
-      <p:sp>
-        <p:nvSpPr>
-          <p:cNvPr id="4" name="Text 1"/>
-          <p:cNvSpPr/>
-          <p:nvPr/>
-        </p:nvSpPr>
-        <p:spPr>
-          <a:xfrm>
-            <a:off x="5349240" y="1005840"/>
-            <a:ext cx="6522415" cy="731520"/>
-          </a:xfrm>
-          <a:prstGeom prst="rect">
-            <a:avLst/>
-          </a:prstGeom>
-          <a:noFill/>
-          <a:ln/>
-        </p:spPr>
-        <p:txBody>
-          <a:bodyPr wrap="square" lIns="0" tIns="0" rIns="0" bIns="0" rtlCol="0" anchor="ctr">
-            <a:normAutofit/>
-          </a:bodyPr>
-          <a:lstStyle/>
-          <a:p>
-            <a:pPr algn="ctr" indent="0" marL="0">
-              <a:buNone/>
-            </a:pPr>
-            <a:r>
-              <a:rPr lang="en-US" sz="3600" b="1" dirty="0">
-                <a:solidFill>
-                  <a:srgbClr val="990011"/>
-                </a:solidFill>
-                <a:latin typeface="Times New Roman" pitchFamily="34" charset="0"/>
-                <a:ea typeface="Times New Roman" pitchFamily="34" charset="-122"/>
-                <a:cs typeface="Times New Roman" pitchFamily="34" charset="-120"/>
-              </a:rPr>
-              <a:t>Correction: Possible Answer</a:t>
-            </a:r>
-            <a:endParaRPr lang="en-US" sz="3600" dirty="0"/>
-          </a:p>
-        </p:txBody>
-      </p:sp>
-      <p:sp>
-        <p:nvSpPr>
-          <p:cNvPr id="5" name="Text 2"/>
-          <p:cNvSpPr/>
-          <p:nvPr/>
-        </p:nvSpPr>
-        <p:spPr>
-          <a:xfrm>
-            <a:off x="5349240" y="1783080"/>
-            <a:ext cx="6522415" cy="4663440"/>
-          </a:xfrm>
-          <a:prstGeom prst="rect">
-            <a:avLst/>
-          </a:prstGeom>
-          <a:noFill/>
-          <a:ln/>
-        </p:spPr>
-        <p:txBody>
-          <a:bodyPr wrap="square" lIns="0" tIns="0" rIns="0" bIns="0" rtlCol="0" anchor="t"/>
-          <a:lstStyle/>
-          <a:p>
-            <a:pPr algn="l" indent="0" marL="0">
-              <a:spcAft>
-                <a:spcPts val="800"/>
-              </a:spcAft>
-              <a:buNone/>
-            </a:pPr>
-            <a:r>
-              <a:rPr lang="en-US" sz="4000" dirty="0">
-                <a:solidFill>
-                  <a:srgbClr val="111111"/>
-                </a:solidFill>
-                <a:latin typeface="Times New Roman" pitchFamily="34" charset="0"/>
-                <a:ea typeface="Times New Roman" pitchFamily="34" charset="-122"/>
-                <a:cs typeface="Times New Roman" pitchFamily="34" charset="-120"/>
-              </a:rPr>
-              <a:t>IRAD.</a:t>
-            </a:r>
-            <a:endParaRPr lang="en-US" sz="4000" dirty="0"/>
-          </a:p>
-        </p:txBody>
-      </p:sp>
-      <p:sp>
-        <p:nvSpPr>
-          <p:cNvPr id="25" name="Slide Number Placeholder 0"/>
-          <p:cNvSpPr>
-            <a:spLocks noGrp="1"/>
-          </p:cNvSpPr>
-          <p:nvPr>
-            <p:ph type="sldNum" sz="quarter" idx="4294967295"/>
-          </p:nvPr>
-        </p:nvSpPr>
-        <p:spPr>
-          <a:xfrm>
-            <a:off x="27432" y="91440"/>
-            <a:ext cx="585216" cy="475488"/>
-          </a:xfrm>
-          <a:prstGeom prst="rect">
-            <a:avLst/>
-          </a:prstGeom>
-          <a:extLst>
-            <a:ext uri="{C572A759-6A51-4108-AA02-DFA0A04FC94B}">
-              <ma14:wrappingTextBoxFlag xmlns:ma14="http://schemas.microsoft.com/office/mac/drawingml/2011/main" val="0"/>
-            </a:ext>
-          </a:extLst>
-        </p:spPr>
-        <p:txBody>
-          <a:bodyPr/>
-          <a:lstStyle>
-            <a:lvl1pPr>
-              <a:defRPr sz="2000">
-                <a:solidFill>
-                  <a:srgbClr val="FFFFFF"/>
-                </a:solidFill>
-                <a:latin typeface="Calibri"/>
-                <a:ea typeface="Calibri"/>
-                <a:cs typeface="Calibri"/>
-              </a:defRPr>
-            </a:lvl1pPr>
-          </a:lstStyle>
-          <a:p>
-            <a:pPr algn="ctr"/>
-            <a:fld id="{F7021451-1387-4CA6-816F-3879F97B5CBC}" type="slidenum">
-              <a:rPr b="1" lang="en-US"/>
-              <a:t>5</a:t>
-            </a:fld>
-            <a:endParaRPr lang="en-US"/>
-          </a:p>
-        </p:txBody>
-      </p:sp>
-    </p:spTree>
-  </p:cSld>
-  <p:clrMapOvr>
-    <a:masterClrMapping/>
-  </p:clrMapOvr>
-</p:sld>
-</file>
-
-<file path=ppt/slides/slide50.xml><?xml version="1.0" encoding="utf-8"?>
-<p:sld xmlns:a="http://schemas.openxmlformats.org/drawingml/2006/main" xmlns:r="http://schemas.openxmlformats.org/officeDocument/2006/relationships" xmlns:p="http://schemas.openxmlformats.org/presentationml/2006/main">
-  <p:cSld name="Slide 50">
-    <p:spTree>
-      <p:nvGrpSpPr>
-        <p:cNvPr id="1" name=""/>
-        <p:cNvGrpSpPr/>
-        <p:nvPr/>
-      </p:nvGrpSpPr>
-      <p:grpSpPr>
-        <a:xfrm>
-          <a:off x="0" y="0"/>
-          <a:ext cx="0" cy="0"/>
-          <a:chOff x="0" y="0"/>
-          <a:chExt cx="0" cy="0"/>
-        </a:xfrm>
-      </p:grpSpPr>
-      <p:sp>
-        <p:nvSpPr>
-          <p:cNvPr id="2" name="Text 0"/>
-          <p:cNvSpPr/>
-          <p:nvPr/>
-        </p:nvSpPr>
-        <p:spPr>
-          <a:xfrm>
-            <a:off x="457200" y="713232"/>
-            <a:ext cx="11368735" cy="274320"/>
-          </a:xfrm>
-          <a:prstGeom prst="rect">
-            <a:avLst/>
-          </a:prstGeom>
-          <a:noFill/>
-          <a:ln/>
-        </p:spPr>
-        <p:txBody>
-          <a:bodyPr wrap="square" lIns="0" tIns="0" rIns="0" bIns="0" rtlCol="0" anchor="ctr"/>
-          <a:lstStyle/>
-          <a:p>
-            <a:pPr algn="r" indent="0" marL="0">
-              <a:buNone/>
-            </a:pPr>
-            <a:r>
-              <a:rPr lang="en-US" sz="1400" b="1" dirty="0">
-                <a:solidFill>
-                  <a:srgbClr val="1C3F6E"/>
-                </a:solidFill>
-                <a:latin typeface="Calibri" pitchFamily="34" charset="0"/>
-                <a:ea typeface="Calibri" pitchFamily="34" charset="-122"/>
-                <a:cs typeface="Calibri" pitchFamily="34" charset="-120"/>
-              </a:rPr>
               <a:t>LOGBOOK</a:t>
             </a:r>
             <a:endParaRPr lang="en-US" sz="1400" dirty="0"/>
@@ -19337,7 +19963,7 @@
       </p:sp>
       <p:graphicFrame>
         <p:nvGraphicFramePr>
-          <p:cNvPr id="51" name="Table 0"/>
+          <p:cNvPr id="52" name="Table 0"/>
           <p:cNvGraphicFramePr>
             <a:graphicFrameLocks noGrp="1"/>
           </p:cNvGraphicFramePr>
@@ -19447,7 +20073,7 @@
                           <a:ea typeface="Calibri" pitchFamily="34" charset="-122"/>
                           <a:cs typeface="Calibri" pitchFamily="34" charset="-120"/>
                         </a:rPr>
-                        <a:t>DEFINITIONS; Examples of Quaternary Activities.</a:t>
+                        <a:t>DEFINITIONS; Activities; Importance.</a:t>
                       </a:r>
                       <a:endParaRPr lang="en-US" sz="1600" dirty="0">
                         <a:latin typeface="Calibri" charset="0"/>
@@ -20097,352 +20723,6 @@
             <a:pPr algn="ctr"/>
             <a:fld id="{F7021451-1387-4CA6-816F-3879F97B5CBC}" type="slidenum">
               <a:rPr b="1" lang="en-US"/>
-              <a:t>50</a:t>
-            </a:fld>
-            <a:endParaRPr lang="en-US"/>
-          </a:p>
-        </p:txBody>
-      </p:sp>
-    </p:spTree>
-  </p:cSld>
-  <p:clrMapOvr>
-    <a:masterClrMapping/>
-  </p:clrMapOvr>
-</p:sld>
-</file>
-
-<file path=ppt/slides/slide51.xml><?xml version="1.0" encoding="utf-8"?>
-<p:sld xmlns:a="http://schemas.openxmlformats.org/drawingml/2006/main" xmlns:r="http://schemas.openxmlformats.org/officeDocument/2006/relationships" xmlns:p="http://schemas.openxmlformats.org/presentationml/2006/main">
-  <p:cSld name="Slide 51">
-    <p:spTree>
-      <p:nvGrpSpPr>
-        <p:cNvPr id="1" name=""/>
-        <p:cNvGrpSpPr/>
-        <p:nvPr/>
-      </p:nvGrpSpPr>
-      <p:grpSpPr>
-        <a:xfrm>
-          <a:off x="0" y="0"/>
-          <a:ext cx="0" cy="0"/>
-          <a:chOff x="0" y="0"/>
-          <a:chExt cx="0" cy="0"/>
-        </a:xfrm>
-      </p:grpSpPr>
-      <p:sp>
-        <p:nvSpPr>
-          <p:cNvPr id="2" name="Text 0"/>
-          <p:cNvSpPr/>
-          <p:nvPr/>
-        </p:nvSpPr>
-        <p:spPr>
-          <a:xfrm>
-            <a:off x="457200" y="713232"/>
-            <a:ext cx="11368735" cy="274320"/>
-          </a:xfrm>
-          <a:prstGeom prst="rect">
-            <a:avLst/>
-          </a:prstGeom>
-          <a:noFill/>
-          <a:ln/>
-        </p:spPr>
-        <p:txBody>
-          <a:bodyPr wrap="square" lIns="0" tIns="0" rIns="0" bIns="0" rtlCol="0" anchor="ctr"/>
-          <a:lstStyle/>
-          <a:p>
-            <a:pPr algn="r" indent="0" marL="0">
-              <a:buNone/>
-            </a:pPr>
-            <a:r>
-              <a:rPr lang="en-US" sz="1400" b="1" dirty="0">
-                <a:solidFill>
-                  <a:srgbClr val="1C3F6E"/>
-                </a:solidFill>
-                <a:latin typeface="Calibri" pitchFamily="34" charset="0"/>
-                <a:ea typeface="Calibri" pitchFamily="34" charset="-122"/>
-                <a:cs typeface="Calibri" pitchFamily="34" charset="-120"/>
-              </a:rPr>
-              <a:t>TEACHER'S NOTE</a:t>
-            </a:r>
-            <a:endParaRPr lang="en-US" sz="1400" dirty="0"/>
-          </a:p>
-        </p:txBody>
-      </p:sp>
-      <p:pic>
-        <p:nvPicPr>
-          <p:cNvPr id="3" name="Image 0" descr="/home/claude/f4/img/minesec_sheet.png">    </p:cNvPr>
-          <p:cNvPicPr>
-            <a:picLocks noChangeAspect="1"/>
-          </p:cNvPicPr>
-          <p:nvPr/>
-        </p:nvPicPr>
-        <p:blipFill>
-          <a:blip r:embed="rId1"/>
-          <a:stretch>
-            <a:fillRect/>
-          </a:stretch>
-        </p:blipFill>
-        <p:spPr>
-          <a:xfrm>
-            <a:off x="0" y="658368"/>
-            <a:ext cx="3840480" cy="5833872"/>
-          </a:xfrm>
-          <a:prstGeom prst="rect">
-            <a:avLst/>
-          </a:prstGeom>
-        </p:spPr>
-      </p:pic>
-      <p:sp>
-        <p:nvSpPr>
-          <p:cNvPr id="4" name="Text 1"/>
-          <p:cNvSpPr/>
-          <p:nvPr/>
-        </p:nvSpPr>
-        <p:spPr>
-          <a:xfrm>
-            <a:off x="4069080" y="1005840"/>
-            <a:ext cx="7802575" cy="731520"/>
-          </a:xfrm>
-          <a:prstGeom prst="rect">
-            <a:avLst/>
-          </a:prstGeom>
-          <a:noFill/>
-          <a:ln/>
-        </p:spPr>
-        <p:txBody>
-          <a:bodyPr wrap="square" lIns="0" tIns="0" rIns="0" bIns="0" rtlCol="0" anchor="ctr">
-            <a:normAutofit/>
-          </a:bodyPr>
-          <a:lstStyle/>
-          <a:p>
-            <a:pPr algn="ctr" indent="0" marL="0">
-              <a:buNone/>
-            </a:pPr>
-            <a:r>
-              <a:rPr lang="en-US" sz="3600" b="1" dirty="0">
-                <a:solidFill>
-                  <a:srgbClr val="990011"/>
-                </a:solidFill>
-                <a:latin typeface="Times New Roman" pitchFamily="34" charset="0"/>
-                <a:ea typeface="Times New Roman" pitchFamily="34" charset="-122"/>
-                <a:cs typeface="Times New Roman" pitchFamily="34" charset="-120"/>
-              </a:rPr>
-              <a:t>Teacher's Note</a:t>
-            </a:r>
-            <a:endParaRPr lang="en-US" sz="3600" dirty="0"/>
-          </a:p>
-        </p:txBody>
-      </p:sp>
-      <p:sp>
-        <p:nvSpPr>
-          <p:cNvPr id="5" name="Text 2"/>
-          <p:cNvSpPr/>
-          <p:nvPr/>
-        </p:nvSpPr>
-        <p:spPr>
-          <a:xfrm>
-            <a:off x="4069080" y="1783080"/>
-            <a:ext cx="7802575" cy="4663440"/>
-          </a:xfrm>
-          <a:prstGeom prst="rect">
-            <a:avLst/>
-          </a:prstGeom>
-          <a:noFill/>
-          <a:ln/>
-        </p:spPr>
-        <p:txBody>
-          <a:bodyPr wrap="square" lIns="0" tIns="0" rIns="0" bIns="0" rtlCol="0" anchor="t"/>
-          <a:lstStyle/>
-          <a:p>
-            <a:pPr algn="l" marL="342900" indent="-342900">
-              <a:spcAft>
-                <a:spcPts val="800"/>
-              </a:spcAft>
-              <a:buSzPct val="100000"/>
-              <a:buChar char="•"/>
-            </a:pPr>
-            <a:r>
-              <a:rPr lang="en-US" sz="2000" dirty="0">
-                <a:solidFill>
-                  <a:srgbClr val="111111"/>
-                </a:solidFill>
-                <a:latin typeface="Calibri" pitchFamily="34" charset="0"/>
-                <a:ea typeface="Calibri" pitchFamily="34" charset="-122"/>
-                <a:cs typeface="Calibri" pitchFamily="34" charset="-120"/>
-              </a:rPr>
-              <a:t>Timing: Homework correction, plan, objectives 8 min | Recall, situation, action 10 min | 5 activities 30 min | Board summary (copying) 30 min | Evaluation, remediation 10 min | Homework, next lesson 5 min | Logbook 7 min</a:t>
-            </a:r>
-            <a:endParaRPr lang="en-US" sz="2000" dirty="0"/>
-          </a:p>
-          <a:p>
-            <a:pPr algn="l" marL="342900" indent="-342900">
-              <a:spcAft>
-                <a:spcPts val="800"/>
-              </a:spcAft>
-              <a:buSzPct val="100000"/>
-              <a:buChar char="•"/>
-            </a:pPr>
-            <a:r>
-              <a:rPr lang="en-US" sz="2000" dirty="0">
-                <a:solidFill>
-                  <a:srgbClr val="111111"/>
-                </a:solidFill>
-                <a:latin typeface="Calibri" pitchFamily="34" charset="0"/>
-                <a:ea typeface="Calibri" pitchFamily="34" charset="-122"/>
-                <a:cs typeface="Calibri" pitchFamily="34" charset="-120"/>
-              </a:rPr>
-              <a:t>IRAD: Institut de Recherche Agricole pour le Développement, with a regional centre at Garoua.</a:t>
-            </a:r>
-            <a:endParaRPr lang="en-US" sz="2000" dirty="0"/>
-          </a:p>
-          <a:p>
-            <a:pPr algn="l" marL="342900" indent="-342900">
-              <a:spcAft>
-                <a:spcPts val="800"/>
-              </a:spcAft>
-              <a:buSzPct val="100000"/>
-              <a:buChar char="•"/>
-            </a:pPr>
-            <a:r>
-              <a:rPr lang="en-US" sz="2000" dirty="0">
-                <a:solidFill>
-                  <a:srgbClr val="111111"/>
-                </a:solidFill>
-                <a:latin typeface="Calibri" pitchFamily="34" charset="0"/>
-                <a:ea typeface="Calibri" pitchFamily="34" charset="-122"/>
-                <a:cs typeface="Calibri" pitchFamily="34" charset="-120"/>
-              </a:rPr>
-              <a:t>Without the projector (Activity 1): describe a laboratory.</a:t>
-            </a:r>
-            <a:endParaRPr lang="en-US" sz="2000" dirty="0"/>
-          </a:p>
-          <a:p>
-            <a:pPr algn="l" marL="342900" indent="-342900">
-              <a:spcAft>
-                <a:spcPts val="800"/>
-              </a:spcAft>
-              <a:buSzPct val="100000"/>
-              <a:buChar char="•"/>
-            </a:pPr>
-            <a:r>
-              <a:rPr lang="en-US" sz="2000" dirty="0">
-                <a:solidFill>
-                  <a:srgbClr val="111111"/>
-                </a:solidFill>
-                <a:latin typeface="Calibri" pitchFamily="34" charset="0"/>
-                <a:ea typeface="Calibri" pitchFamily="34" charset="-122"/>
-                <a:cs typeface="Calibri" pitchFamily="34" charset="-120"/>
-              </a:rPr>
-              <a:t>Without the projector (Activity 2): name IRAD in Garoua.</a:t>
-            </a:r>
-            <a:endParaRPr lang="en-US" sz="2000" dirty="0"/>
-          </a:p>
-          <a:p>
-            <a:pPr algn="l" marL="342900" indent="-342900">
-              <a:spcAft>
-                <a:spcPts val="800"/>
-              </a:spcAft>
-              <a:buSzPct val="100000"/>
-              <a:buChar char="•"/>
-            </a:pPr>
-            <a:r>
-              <a:rPr lang="en-US" sz="2000" dirty="0">
-                <a:solidFill>
-                  <a:srgbClr val="111111"/>
-                </a:solidFill>
-                <a:latin typeface="Calibri" pitchFamily="34" charset="0"/>
-                <a:ea typeface="Calibri" pitchFamily="34" charset="-122"/>
-                <a:cs typeface="Calibri" pitchFamily="34" charset="-120"/>
-              </a:rPr>
-              <a:t>Without the projector (Activity 3): ask who uses a phone for work.</a:t>
-            </a:r>
-            <a:endParaRPr lang="en-US" sz="2000" dirty="0"/>
-          </a:p>
-          <a:p>
-            <a:pPr algn="l" marL="342900" indent="-342900">
-              <a:spcAft>
-                <a:spcPts val="800"/>
-              </a:spcAft>
-              <a:buSzPct val="100000"/>
-              <a:buChar char="•"/>
-            </a:pPr>
-            <a:r>
-              <a:rPr lang="en-US" sz="2000" dirty="0">
-                <a:solidFill>
-                  <a:srgbClr val="111111"/>
-                </a:solidFill>
-                <a:latin typeface="Calibri" pitchFamily="34" charset="0"/>
-                <a:ea typeface="Calibri" pitchFamily="34" charset="-122"/>
-                <a:cs typeface="Calibri" pitchFamily="34" charset="-120"/>
-              </a:rPr>
-              <a:t>Without the projector (Activity 4): name apps.</a:t>
-            </a:r>
-            <a:endParaRPr lang="en-US" sz="2000" dirty="0"/>
-          </a:p>
-          <a:p>
-            <a:pPr algn="l" marL="342900" indent="-342900">
-              <a:spcAft>
-                <a:spcPts val="800"/>
-              </a:spcAft>
-              <a:buSzPct val="100000"/>
-              <a:buChar char="•"/>
-            </a:pPr>
-            <a:r>
-              <a:rPr lang="en-US" sz="2000" dirty="0">
-                <a:solidFill>
-                  <a:srgbClr val="111111"/>
-                </a:solidFill>
-                <a:latin typeface="Calibri" pitchFamily="34" charset="0"/>
-                <a:ea typeface="Calibri" pitchFamily="34" charset="-122"/>
-                <a:cs typeface="Calibri" pitchFamily="34" charset="-120"/>
-              </a:rPr>
-              <a:t>Without the projector (Activity 5): draw arrows.</a:t>
-            </a:r>
-            <a:endParaRPr lang="en-US" sz="2000" dirty="0"/>
-          </a:p>
-        </p:txBody>
-      </p:sp>
-      <p:sp>
-        <p:nvSpPr>
-          <p:cNvPr id="25" name="Slide Number Placeholder 0"/>
-          <p:cNvSpPr>
-            <a:spLocks noGrp="1"/>
-          </p:cNvSpPr>
-          <p:nvPr>
-            <p:ph type="sldNum" sz="quarter" idx="4294967295"/>
-          </p:nvPr>
-        </p:nvSpPr>
-        <p:spPr>
-          <a:xfrm>
-            <a:off x="27432" y="91440"/>
-            <a:ext cx="585216" cy="475488"/>
-          </a:xfrm>
-          <a:prstGeom prst="rect">
-            <a:avLst/>
-          </a:prstGeom>
-          <a:extLst>
-            <a:ext uri="{C572A759-6A51-4108-AA02-DFA0A04FC94B}">
-              <ma14:wrappingTextBoxFlag xmlns:ma14="http://schemas.microsoft.com/office/mac/drawingml/2011/main" val="0"/>
-            </a:ext>
-          </a:extLst>
-        </p:spPr>
-        <p:txBody>
-          <a:bodyPr/>
-          <a:lstStyle>
-            <a:lvl1pPr>
-              <a:defRPr sz="2000">
-                <a:solidFill>
-                  <a:srgbClr val="FFFFFF"/>
-                </a:solidFill>
-                <a:latin typeface="Calibri"/>
-                <a:ea typeface="Calibri"/>
-                <a:cs typeface="Calibri"/>
-              </a:defRPr>
-            </a:lvl1pPr>
-          </a:lstStyle>
-          <a:p>
-            <a:pPr algn="ctr"/>
-            <a:fld id="{F7021451-1387-4CA6-816F-3879F97B5CBC}" type="slidenum">
-              <a:rPr b="1" lang="en-US"/>
               <a:t>51</a:t>
             </a:fld>
             <a:endParaRPr lang="en-US"/>
@@ -20507,7 +20787,7 @@
                 <a:ea typeface="Calibri" pitchFamily="34" charset="-122"/>
                 <a:cs typeface="Calibri" pitchFamily="34" charset="-120"/>
               </a:rPr>
-              <a:t>REFERENCES</a:t>
+              <a:t>TEACHER'S NOTE</a:t>
             </a:r>
             <a:endParaRPr lang="en-US" sz="1400" dirty="0"/>
           </a:p>
@@ -20530,7 +20810,7 @@
         <p:spPr>
           <a:xfrm>
             <a:off x="0" y="658368"/>
-            <a:ext cx="1463040" cy="5833872"/>
+            <a:ext cx="3840480" cy="5833872"/>
           </a:xfrm>
           <a:prstGeom prst="rect">
             <a:avLst/>
@@ -20545,8 +20825,8 @@
         </p:nvSpPr>
         <p:spPr>
           <a:xfrm>
-            <a:off x="1691640" y="1005840"/>
-            <a:ext cx="10180015" cy="731520"/>
+            <a:off x="4069080" y="1005840"/>
+            <a:ext cx="7802575" cy="731520"/>
           </a:xfrm>
           <a:prstGeom prst="rect">
             <a:avLst/>
@@ -20572,7 +20852,7 @@
                 <a:ea typeface="Times New Roman" pitchFamily="34" charset="-122"/>
                 <a:cs typeface="Times New Roman" pitchFamily="34" charset="-120"/>
               </a:rPr>
-              <a:t>References</a:t>
+              <a:t>Teacher's Note</a:t>
             </a:r>
             <a:endParaRPr lang="en-US" sz="3600" dirty="0"/>
           </a:p>
@@ -20586,8 +20866,8 @@
         </p:nvSpPr>
         <p:spPr>
           <a:xfrm>
-            <a:off x="1691640" y="1783080"/>
-            <a:ext cx="10180015" cy="4663440"/>
+            <a:off x="4069080" y="1783080"/>
+            <a:ext cx="7802575" cy="4663440"/>
           </a:xfrm>
           <a:prstGeom prst="rect">
             <a:avLst/>
@@ -20607,7 +20887,7 @@
               <a:buChar char="•"/>
             </a:pPr>
             <a:r>
-              <a:rPr lang="en-US" sz="1800" dirty="0">
+              <a:rPr lang="en-US" sz="2000" dirty="0">
                 <a:solidFill>
                   <a:srgbClr val="111111"/>
                 </a:solidFill>
@@ -20615,9 +20895,9 @@
                 <a:ea typeface="Calibri" pitchFamily="34" charset="-122"/>
                 <a:cs typeface="Calibri" pitchFamily="34" charset="-120"/>
               </a:rPr>
-              <a:t>Harmonised Progression Sheet, Economic Geography (5051), Form 2.</a:t>
-            </a:r>
-            <a:endParaRPr lang="en-US" sz="1800" dirty="0"/>
+              <a:t>Timing: Homework correction, plan, objectives 8 min | Recall, situation, action 10 min | 5 activities 30 min | Board summary (copying) 30 min | Evaluation, remediation 10 min | Homework, next lesson 5 min | Logbook 7 min</a:t>
+            </a:r>
+            <a:endParaRPr lang="en-US" sz="2000" dirty="0"/>
           </a:p>
           <a:p>
             <a:pPr algn="l" marL="342900" indent="-342900">
@@ -20628,7 +20908,7 @@
               <a:buChar char="•"/>
             </a:pPr>
             <a:r>
-              <a:rPr lang="en-US" sz="1800" dirty="0">
+              <a:rPr lang="en-US" sz="2000" dirty="0">
                 <a:solidFill>
                   <a:srgbClr val="111111"/>
                 </a:solidFill>
@@ -20636,9 +20916,9 @@
                 <a:ea typeface="Calibri" pitchFamily="34" charset="-122"/>
                 <a:cs typeface="Calibri" pitchFamily="34" charset="-120"/>
               </a:rPr>
-              <a:t>IRAD: Institut de Recherche Agricole pour le Développement (Cameroon).</a:t>
-            </a:r>
-            <a:endParaRPr lang="en-US" sz="1800" dirty="0"/>
+              <a:t>IRAD: Institut de Recherche Agricole pour le Développement, with a regional centre at Garoua.</a:t>
+            </a:r>
+            <a:endParaRPr lang="en-US" sz="2000" dirty="0"/>
           </a:p>
           <a:p>
             <a:pPr algn="l" marL="342900" indent="-342900">
@@ -20649,7 +20929,7 @@
               <a:buChar char="•"/>
             </a:pPr>
             <a:r>
-              <a:rPr lang="en-US" sz="1800" dirty="0">
+              <a:rPr lang="en-US" sz="2000" dirty="0">
                 <a:solidFill>
                   <a:srgbClr val="111111"/>
                 </a:solidFill>
@@ -20657,9 +20937,9 @@
                 <a:ea typeface="Calibri" pitchFamily="34" charset="-122"/>
                 <a:cs typeface="Calibri" pitchFamily="34" charset="-120"/>
               </a:rPr>
-              <a:t>Photo, Activity 1: “U.S. Army research unit marks four decades in Kenya, Africa - USAMRU-K” by US Army Africa, CC BY 2.0, via Flickr (https://www.flickr.com/photos/36281822@N08/4074611177)</a:t>
-            </a:r>
-            <a:endParaRPr lang="en-US" sz="1800" dirty="0"/>
+              <a:t>Without the projector (Activity 1): describe a laboratory.</a:t>
+            </a:r>
+            <a:endParaRPr lang="en-US" sz="2000" dirty="0"/>
           </a:p>
           <a:p>
             <a:pPr algn="l" marL="342900" indent="-342900">
@@ -20670,7 +20950,7 @@
               <a:buChar char="•"/>
             </a:pPr>
             <a:r>
-              <a:rPr lang="en-US" sz="1800" dirty="0">
+              <a:rPr lang="en-US" sz="2000" dirty="0">
                 <a:solidFill>
                   <a:srgbClr val="111111"/>
                 </a:solidFill>
@@ -20678,9 +20958,9 @@
                 <a:ea typeface="Calibri" pitchFamily="34" charset="-122"/>
                 <a:cs typeface="Calibri" pitchFamily="34" charset="-120"/>
               </a:rPr>
-              <a:t>Photo, Activity 2: “CIMMYT international wheat nurseries growing in Ecuador” by CIMMYT, CC BY-NC-SA 2.0, via Flickr (https://www.flickr.com/photos/44760652@N05/5958068839)</a:t>
-            </a:r>
-            <a:endParaRPr lang="en-US" sz="1800" dirty="0"/>
+              <a:t>Without the projector (Activity 2): name IRAD in Garoua.</a:t>
+            </a:r>
+            <a:endParaRPr lang="en-US" sz="2000" dirty="0"/>
           </a:p>
           <a:p>
             <a:pPr algn="l" marL="342900" indent="-342900">
@@ -20691,7 +20971,7 @@
               <a:buChar char="•"/>
             </a:pPr>
             <a:r>
-              <a:rPr lang="en-US" sz="1800" dirty="0">
+              <a:rPr lang="en-US" sz="2000" dirty="0">
                 <a:solidFill>
                   <a:srgbClr val="111111"/>
                 </a:solidFill>
@@ -20699,9 +20979,9 @@
                 <a:ea typeface="Calibri" pitchFamily="34" charset="-122"/>
                 <a:cs typeface="Calibri" pitchFamily="34" charset="-120"/>
               </a:rPr>
-              <a:t>Photo, Activity 3: “Using mobile technology to give feedback about the crop trials” by Bioversity International, CC BY-NC-ND 2.0, via Flickr (https://www.flickr.com/photos/50383637@N07/15019002626)</a:t>
-            </a:r>
-            <a:endParaRPr lang="en-US" sz="1800" dirty="0"/>
+              <a:t>Without the projector (Activity 3): ask who uses a phone for work.</a:t>
+            </a:r>
+            <a:endParaRPr lang="en-US" sz="2000" dirty="0"/>
           </a:p>
           <a:p>
             <a:pPr algn="l" marL="342900" indent="-342900">
@@ -20712,7 +20992,7 @@
               <a:buChar char="•"/>
             </a:pPr>
             <a:r>
-              <a:rPr lang="en-US" sz="1800" dirty="0">
+              <a:rPr lang="en-US" sz="2000" dirty="0">
                 <a:solidFill>
                   <a:srgbClr val="111111"/>
                 </a:solidFill>
@@ -20720,9 +21000,9 @@
                 <a:ea typeface="Calibri" pitchFamily="34" charset="-122"/>
                 <a:cs typeface="Calibri" pitchFamily="34" charset="-120"/>
               </a:rPr>
-              <a:t>Photo, Activity 4: “The Oneputa Combined School goes from Grade 1 through to Grade 10” by World Bank Photo Collection, CC BY-NC-ND 2.0, via Flickr (https://www.flickr.com/photos/10816734@N03/5321464442)</a:t>
-            </a:r>
-            <a:endParaRPr lang="en-US" sz="1800" dirty="0"/>
+              <a:t>Without the projector (Activity 4): name apps.</a:t>
+            </a:r>
+            <a:endParaRPr lang="en-US" sz="2000" dirty="0"/>
           </a:p>
           <a:p>
             <a:pPr algn="l" marL="342900" indent="-342900">
@@ -20733,7 +21013,7 @@
               <a:buChar char="•"/>
             </a:pPr>
             <a:r>
-              <a:rPr lang="en-US" sz="1800" dirty="0">
+              <a:rPr lang="en-US" sz="2000" dirty="0">
                 <a:solidFill>
                   <a:srgbClr val="111111"/>
                 </a:solidFill>
@@ -20741,9 +21021,9 @@
                 <a:ea typeface="Calibri" pitchFamily="34" charset="-122"/>
                 <a:cs typeface="Calibri" pitchFamily="34" charset="-120"/>
               </a:rPr>
-              <a:t>Diagrams and animations: drawn for this lesson (Geography Department).</a:t>
-            </a:r>
-            <a:endParaRPr lang="en-US" sz="1800" dirty="0"/>
+              <a:t>Without the projector (Activity 5): draw arrows.</a:t>
+            </a:r>
+            <a:endParaRPr lang="en-US" sz="2000" dirty="0"/>
           </a:p>
         </p:txBody>
       </p:sp>
@@ -20790,6 +21070,352 @@
             <a:fld id="{F7021451-1387-4CA6-816F-3879F97B5CBC}" type="slidenum">
               <a:rPr b="1" lang="en-US"/>
               <a:t>52</a:t>
+            </a:fld>
+            <a:endParaRPr lang="en-US"/>
+          </a:p>
+        </p:txBody>
+      </p:sp>
+    </p:spTree>
+  </p:cSld>
+  <p:clrMapOvr>
+    <a:masterClrMapping/>
+  </p:clrMapOvr>
+</p:sld>
+</file>
+
+<file path=ppt/slides/slide53.xml><?xml version="1.0" encoding="utf-8"?>
+<p:sld xmlns:a="http://schemas.openxmlformats.org/drawingml/2006/main" xmlns:r="http://schemas.openxmlformats.org/officeDocument/2006/relationships" xmlns:p="http://schemas.openxmlformats.org/presentationml/2006/main">
+  <p:cSld name="Slide 53">
+    <p:spTree>
+      <p:nvGrpSpPr>
+        <p:cNvPr id="1" name=""/>
+        <p:cNvGrpSpPr/>
+        <p:nvPr/>
+      </p:nvGrpSpPr>
+      <p:grpSpPr>
+        <a:xfrm>
+          <a:off x="0" y="0"/>
+          <a:ext cx="0" cy="0"/>
+          <a:chOff x="0" y="0"/>
+          <a:chExt cx="0" cy="0"/>
+        </a:xfrm>
+      </p:grpSpPr>
+      <p:sp>
+        <p:nvSpPr>
+          <p:cNvPr id="2" name="Text 0"/>
+          <p:cNvSpPr/>
+          <p:nvPr/>
+        </p:nvSpPr>
+        <p:spPr>
+          <a:xfrm>
+            <a:off x="457200" y="713232"/>
+            <a:ext cx="11368735" cy="274320"/>
+          </a:xfrm>
+          <a:prstGeom prst="rect">
+            <a:avLst/>
+          </a:prstGeom>
+          <a:noFill/>
+          <a:ln/>
+        </p:spPr>
+        <p:txBody>
+          <a:bodyPr wrap="square" lIns="0" tIns="0" rIns="0" bIns="0" rtlCol="0" anchor="ctr"/>
+          <a:lstStyle/>
+          <a:p>
+            <a:pPr algn="r" indent="0" marL="0">
+              <a:buNone/>
+            </a:pPr>
+            <a:r>
+              <a:rPr lang="en-US" sz="1400" b="1" dirty="0">
+                <a:solidFill>
+                  <a:srgbClr val="1C3F6E"/>
+                </a:solidFill>
+                <a:latin typeface="Calibri" pitchFamily="34" charset="0"/>
+                <a:ea typeface="Calibri" pitchFamily="34" charset="-122"/>
+                <a:cs typeface="Calibri" pitchFamily="34" charset="-120"/>
+              </a:rPr>
+              <a:t>REFERENCES</a:t>
+            </a:r>
+            <a:endParaRPr lang="en-US" sz="1400" dirty="0"/>
+          </a:p>
+        </p:txBody>
+      </p:sp>
+      <p:pic>
+        <p:nvPicPr>
+          <p:cNvPr id="3" name="Image 0" descr="/home/claude/f4/img/minesec_sheet.png">    </p:cNvPr>
+          <p:cNvPicPr>
+            <a:picLocks noChangeAspect="1"/>
+          </p:cNvPicPr>
+          <p:nvPr/>
+        </p:nvPicPr>
+        <p:blipFill>
+          <a:blip r:embed="rId1"/>
+          <a:stretch>
+            <a:fillRect/>
+          </a:stretch>
+        </p:blipFill>
+        <p:spPr>
+          <a:xfrm>
+            <a:off x="0" y="658368"/>
+            <a:ext cx="1463040" cy="5833872"/>
+          </a:xfrm>
+          <a:prstGeom prst="rect">
+            <a:avLst/>
+          </a:prstGeom>
+        </p:spPr>
+      </p:pic>
+      <p:sp>
+        <p:nvSpPr>
+          <p:cNvPr id="4" name="Text 1"/>
+          <p:cNvSpPr/>
+          <p:nvPr/>
+        </p:nvSpPr>
+        <p:spPr>
+          <a:xfrm>
+            <a:off x="1691640" y="1005840"/>
+            <a:ext cx="10180015" cy="731520"/>
+          </a:xfrm>
+          <a:prstGeom prst="rect">
+            <a:avLst/>
+          </a:prstGeom>
+          <a:noFill/>
+          <a:ln/>
+        </p:spPr>
+        <p:txBody>
+          <a:bodyPr wrap="square" lIns="0" tIns="0" rIns="0" bIns="0" rtlCol="0" anchor="ctr">
+            <a:normAutofit/>
+          </a:bodyPr>
+          <a:lstStyle/>
+          <a:p>
+            <a:pPr algn="ctr" indent="0" marL="0">
+              <a:buNone/>
+            </a:pPr>
+            <a:r>
+              <a:rPr lang="en-US" sz="3600" b="1" dirty="0">
+                <a:solidFill>
+                  <a:srgbClr val="990011"/>
+                </a:solidFill>
+                <a:latin typeface="Times New Roman" pitchFamily="34" charset="0"/>
+                <a:ea typeface="Times New Roman" pitchFamily="34" charset="-122"/>
+                <a:cs typeface="Times New Roman" pitchFamily="34" charset="-120"/>
+              </a:rPr>
+              <a:t>References</a:t>
+            </a:r>
+            <a:endParaRPr lang="en-US" sz="3600" dirty="0"/>
+          </a:p>
+        </p:txBody>
+      </p:sp>
+      <p:sp>
+        <p:nvSpPr>
+          <p:cNvPr id="5" name="Text 2"/>
+          <p:cNvSpPr/>
+          <p:nvPr/>
+        </p:nvSpPr>
+        <p:spPr>
+          <a:xfrm>
+            <a:off x="1691640" y="1783080"/>
+            <a:ext cx="10180015" cy="4663440"/>
+          </a:xfrm>
+          <a:prstGeom prst="rect">
+            <a:avLst/>
+          </a:prstGeom>
+          <a:noFill/>
+          <a:ln/>
+        </p:spPr>
+        <p:txBody>
+          <a:bodyPr wrap="square" lIns="0" tIns="0" rIns="0" bIns="0" rtlCol="0" anchor="t"/>
+          <a:lstStyle/>
+          <a:p>
+            <a:pPr algn="l" marL="342900" indent="-342900">
+              <a:spcAft>
+                <a:spcPts val="800"/>
+              </a:spcAft>
+              <a:buSzPct val="100000"/>
+              <a:buChar char="•"/>
+            </a:pPr>
+            <a:r>
+              <a:rPr lang="en-US" sz="1800" dirty="0">
+                <a:solidFill>
+                  <a:srgbClr val="111111"/>
+                </a:solidFill>
+                <a:latin typeface="Calibri" pitchFamily="34" charset="0"/>
+                <a:ea typeface="Calibri" pitchFamily="34" charset="-122"/>
+                <a:cs typeface="Calibri" pitchFamily="34" charset="-120"/>
+              </a:rPr>
+              <a:t>Harmonised Progression Sheet, Economic Geography (5051), Form 2.</a:t>
+            </a:r>
+            <a:endParaRPr lang="en-US" sz="1800" dirty="0"/>
+          </a:p>
+          <a:p>
+            <a:pPr algn="l" marL="342900" indent="-342900">
+              <a:spcAft>
+                <a:spcPts val="800"/>
+              </a:spcAft>
+              <a:buSzPct val="100000"/>
+              <a:buChar char="•"/>
+            </a:pPr>
+            <a:r>
+              <a:rPr lang="en-US" sz="1800" dirty="0">
+                <a:solidFill>
+                  <a:srgbClr val="111111"/>
+                </a:solidFill>
+                <a:latin typeface="Calibri" pitchFamily="34" charset="0"/>
+                <a:ea typeface="Calibri" pitchFamily="34" charset="-122"/>
+                <a:cs typeface="Calibri" pitchFamily="34" charset="-120"/>
+              </a:rPr>
+              <a:t>IRAD: Institut de Recherche Agricole pour le Développement (Cameroon).</a:t>
+            </a:r>
+            <a:endParaRPr lang="en-US" sz="1800" dirty="0"/>
+          </a:p>
+          <a:p>
+            <a:pPr algn="l" marL="342900" indent="-342900">
+              <a:spcAft>
+                <a:spcPts val="800"/>
+              </a:spcAft>
+              <a:buSzPct val="100000"/>
+              <a:buChar char="•"/>
+            </a:pPr>
+            <a:r>
+              <a:rPr lang="en-US" sz="1800" dirty="0">
+                <a:solidFill>
+                  <a:srgbClr val="111111"/>
+                </a:solidFill>
+                <a:latin typeface="Calibri" pitchFamily="34" charset="0"/>
+                <a:ea typeface="Calibri" pitchFamily="34" charset="-122"/>
+                <a:cs typeface="Calibri" pitchFamily="34" charset="-120"/>
+              </a:rPr>
+              <a:t>Photo, Activity 1: “U.S. Army research unit marks four decades in Kenya, Africa - USAMRU-K” by US Army Africa, CC BY 2.0, via Flickr (https://www.flickr.com/photos/36281822@N08/4074611177)</a:t>
+            </a:r>
+            <a:endParaRPr lang="en-US" sz="1800" dirty="0"/>
+          </a:p>
+          <a:p>
+            <a:pPr algn="l" marL="342900" indent="-342900">
+              <a:spcAft>
+                <a:spcPts val="800"/>
+              </a:spcAft>
+              <a:buSzPct val="100000"/>
+              <a:buChar char="•"/>
+            </a:pPr>
+            <a:r>
+              <a:rPr lang="en-US" sz="1800" dirty="0">
+                <a:solidFill>
+                  <a:srgbClr val="111111"/>
+                </a:solidFill>
+                <a:latin typeface="Calibri" pitchFamily="34" charset="0"/>
+                <a:ea typeface="Calibri" pitchFamily="34" charset="-122"/>
+                <a:cs typeface="Calibri" pitchFamily="34" charset="-120"/>
+              </a:rPr>
+              <a:t>Photo, Activity 2: “CIMMYT international wheat nurseries growing in Ecuador” by CIMMYT, CC BY-NC-SA 2.0, via Flickr (https://www.flickr.com/photos/44760652@N05/5958068839)</a:t>
+            </a:r>
+            <a:endParaRPr lang="en-US" sz="1800" dirty="0"/>
+          </a:p>
+          <a:p>
+            <a:pPr algn="l" marL="342900" indent="-342900">
+              <a:spcAft>
+                <a:spcPts val="800"/>
+              </a:spcAft>
+              <a:buSzPct val="100000"/>
+              <a:buChar char="•"/>
+            </a:pPr>
+            <a:r>
+              <a:rPr lang="en-US" sz="1800" dirty="0">
+                <a:solidFill>
+                  <a:srgbClr val="111111"/>
+                </a:solidFill>
+                <a:latin typeface="Calibri" pitchFamily="34" charset="0"/>
+                <a:ea typeface="Calibri" pitchFamily="34" charset="-122"/>
+                <a:cs typeface="Calibri" pitchFamily="34" charset="-120"/>
+              </a:rPr>
+              <a:t>Photo, Activity 3: “Using mobile technology to give feedback about the crop trials” by Bioversity International, CC BY-NC-ND 2.0, via Flickr (https://www.flickr.com/photos/50383637@N07/15019002626)</a:t>
+            </a:r>
+            <a:endParaRPr lang="en-US" sz="1800" dirty="0"/>
+          </a:p>
+          <a:p>
+            <a:pPr algn="l" marL="342900" indent="-342900">
+              <a:spcAft>
+                <a:spcPts val="800"/>
+              </a:spcAft>
+              <a:buSzPct val="100000"/>
+              <a:buChar char="•"/>
+            </a:pPr>
+            <a:r>
+              <a:rPr lang="en-US" sz="1800" dirty="0">
+                <a:solidFill>
+                  <a:srgbClr val="111111"/>
+                </a:solidFill>
+                <a:latin typeface="Calibri" pitchFamily="34" charset="0"/>
+                <a:ea typeface="Calibri" pitchFamily="34" charset="-122"/>
+                <a:cs typeface="Calibri" pitchFamily="34" charset="-120"/>
+              </a:rPr>
+              <a:t>Photo, Activity 4: “The Oneputa Combined School goes from Grade 1 through to Grade 10” by World Bank Photo Collection, CC BY-NC-ND 2.0, via Flickr (https://www.flickr.com/photos/10816734@N03/5321464442)</a:t>
+            </a:r>
+            <a:endParaRPr lang="en-US" sz="1800" dirty="0"/>
+          </a:p>
+          <a:p>
+            <a:pPr algn="l" marL="342900" indent="-342900">
+              <a:spcAft>
+                <a:spcPts val="800"/>
+              </a:spcAft>
+              <a:buSzPct val="100000"/>
+              <a:buChar char="•"/>
+            </a:pPr>
+            <a:r>
+              <a:rPr lang="en-US" sz="1800" dirty="0">
+                <a:solidFill>
+                  <a:srgbClr val="111111"/>
+                </a:solidFill>
+                <a:latin typeface="Calibri" pitchFamily="34" charset="0"/>
+                <a:ea typeface="Calibri" pitchFamily="34" charset="-122"/>
+                <a:cs typeface="Calibri" pitchFamily="34" charset="-120"/>
+              </a:rPr>
+              <a:t>Diagrams and animations: drawn for this lesson (Geography Department).</a:t>
+            </a:r>
+            <a:endParaRPr lang="en-US" sz="1800" dirty="0"/>
+          </a:p>
+        </p:txBody>
+      </p:sp>
+      <p:sp>
+        <p:nvSpPr>
+          <p:cNvPr id="25" name="Slide Number Placeholder 0"/>
+          <p:cNvSpPr>
+            <a:spLocks noGrp="1"/>
+          </p:cNvSpPr>
+          <p:nvPr>
+            <p:ph type="sldNum" sz="quarter" idx="4294967295"/>
+          </p:nvPr>
+        </p:nvSpPr>
+        <p:spPr>
+          <a:xfrm>
+            <a:off x="27432" y="91440"/>
+            <a:ext cx="585216" cy="475488"/>
+          </a:xfrm>
+          <a:prstGeom prst="rect">
+            <a:avLst/>
+          </a:prstGeom>
+          <a:extLst>
+            <a:ext uri="{C572A759-6A51-4108-AA02-DFA0A04FC94B}">
+              <ma14:wrappingTextBoxFlag xmlns:ma14="http://schemas.microsoft.com/office/mac/drawingml/2011/main" val="0"/>
+            </a:ext>
+          </a:extLst>
+        </p:spPr>
+        <p:txBody>
+          <a:bodyPr/>
+          <a:lstStyle>
+            <a:lvl1pPr>
+              <a:defRPr sz="2000">
+                <a:solidFill>
+                  <a:srgbClr val="FFFFFF"/>
+                </a:solidFill>
+                <a:latin typeface="Calibri"/>
+                <a:ea typeface="Calibri"/>
+                <a:cs typeface="Calibri"/>
+              </a:defRPr>
+            </a:lvl1pPr>
+          </a:lstStyle>
+          <a:p>
+            <a:pPr algn="ctr"/>
+            <a:fld id="{F7021451-1387-4CA6-816F-3879F97B5CBC}" type="slidenum">
+              <a:rPr b="1" lang="en-US"/>
+              <a:t>53</a:t>
             </a:fld>
             <a:endParaRPr lang="en-US"/>
           </a:p>
